--- a/8月5日に見せるスライド_更新版.pptx
+++ b/8月5日に見せるスライド_更新版.pptx
@@ -13,6 +13,7 @@
     <p:sldId id="263" r:id="rId10"/>
     <p:sldId id="264" r:id="rId11"/>
     <p:sldId id="261" r:id="rId3"/>
+    <p:sldId id="268" r:id="rId15"/>
     <p:sldId id="265" r:id="rId12"/>
     <p:sldId id="266" r:id="rId13"/>
     <p:sldId id="267" r:id="rId14"/>
@@ -1628,9 +1629,30 @@
               <a:t>個別軌跡を重ねると、訴えあり群（赤）のほうが軌跡のばらつきが大きい。個人内変動幅の平均は 4.67点 対 3.05点、18か月ΔMMSEのSDは 4.76 対 2.83 で、いずれも訴えあり群のほうが大きい。</a:t>
             </a:r>
           </a:p>
-          <a:p>
-            <a:r>
-              <a:t>つまり「訴えあり」は平均の水準ではなく、変動の大きさの側に現れている可能性がある。ただしこれは事後的な観察であり、n=9 では分散の差の検定も安定しない。</a:t>
+          <a:p/>
+          <a:p>
+            <a:r>
+              <a:t>【統計的な判定（2種類あるので混同しないこと）】</a:t>
+            </a:r>
+          </a:p>
+          <a:p>
+            <a:r>
+              <a:t>① 個人内変動幅（4時点の最大−最小）の中央値の比較：Mann-Whitney検定 p = 0.034 → 名目上は有意。</a:t>
+            </a:r>
+          </a:p>
+          <a:p>
+            <a:r>
+              <a:t>② Δ18MのSDそのものの均一性：Levene検定 p = 0.146 → 有意差なし。</a:t>
+            </a:r>
+          </a:p>
+          <a:p>
+            <a:r>
+              <a:t>①と②は近い概念だが同じではない。①は「事後的に定義した指標」であり、多重比較の補正もしていない探索的な検定である。②のほうが分散の差を検定する標準的な方法だが、こちらは有意ではない。</a:t>
+            </a:r>
+          </a:p>
+          <a:p>
+            <a:r>
+              <a:t>発表では「個人内変動幅ではp=0.034で名目上の有意差があったが、事前登録された仮説ではなく、標準的な分散の検定（Levene）では有意ではなかった」と両方正直に伝えるのが誠実。</a:t>
             </a:r>
           </a:p>
           <a:p/>
@@ -1991,6 +2013,95 @@
           <a:p>
             <a:r>
               <a:t>「易怒性／意欲低下のどちらかを解析から減らすべきか」という論点については、指示書の方針に従い削除は実行していない。確認事項リストに論点として記載した。</a:t>
+            </a:r>
+          </a:p>
+        </p:txBody>
+      </p:sp>
+    </p:spTree>
+  </p:cSld>
+  <p:clrMapOvr>
+    <a:masterClrMapping/>
+  </p:clrMapOvr>
+</p:notes>
+</file>
+
+<file path=ppt/notesSlides/notesSlide9.xml><?xml version="1.0" encoding="utf-8"?>
+<p:notes xmlns:a="http://schemas.openxmlformats.org/drawingml/2006/main" xmlns:p="http://schemas.openxmlformats.org/presentationml/2006/main" xmlns:r="http://schemas.openxmlformats.org/officeDocument/2006/relationships">
+  <p:cSld>
+    <p:spTree>
+      <p:nvGrpSpPr>
+        <p:cNvPr id="1" name=""/>
+        <p:cNvGrpSpPr/>
+        <p:nvPr/>
+      </p:nvGrpSpPr>
+      <p:grpSpPr>
+        <a:xfrm>
+          <a:off x="0" y="0"/>
+          <a:ext cx="0" cy="0"/>
+          <a:chOff x="0" y="0"/>
+          <a:chExt cx="0" cy="0"/>
+        </a:xfrm>
+      </p:grpSpPr>
+      <p:sp>
+        <p:nvSpPr>
+          <p:cNvPr id="2" name="Notes Placeholder 1"/>
+          <p:cNvSpPr>
+            <a:spLocks noGrp="1"/>
+          </p:cNvSpPr>
+          <p:nvPr>
+            <p:ph type="body" idx="1"/>
+          </p:nvPr>
+        </p:nvSpPr>
+        <p:spPr/>
+        <p:txBody>
+          <a:bodyPr/>
+          <a:lstStyle/>
+          <a:p>
+            <a:r>
+              <a:t>【このスライドの存在理由】</a:t>
+            </a:r>
+          </a:p>
+          <a:p>
+            <a:r>
+              <a:t>各スライドに散らばっている統計結果を1枚に集約し、上野先生が一目で全体像を把握できるようにした。</a:t>
+            </a:r>
+          </a:p>
+          <a:p/>
+          <a:p>
+            <a:r>
+              <a:t>【本研究で唯一「有意」と出た所見について】</a:t>
+            </a:r>
+          </a:p>
+          <a:p>
+            <a:r>
+              <a:t>参考2のベースラインMMSEとΔMMSEの相関（r=−0.50, p=0.006）が、本一連の解析で唯一 p&lt;0.05 に達した結果である。</a:t>
+            </a:r>
+          </a:p>
+          <a:p>
+            <a:r>
+              <a:t>ただしこれはΔ = 18か月値−ベースライン値という定義上、平均への回帰を数学的に含むため、「重症度が高いほど悪化する」という因果関係の証拠として提示すべきではない。</a:t>
+            </a:r>
+          </a:p>
+          <a:p/>
+          <a:p>
+            <a:r>
+              <a:t>【結果3の「個人内変動幅」について】</a:t>
+            </a:r>
+          </a:p>
+          <a:p>
+            <a:r>
+              <a:t>Mann-Whitney p=0.034は名目上0.05を下回るが、①図を見てから事後的に定義した指標である、②多重比較の補正をしていない、③より標準的な分散の検定（Levene, p=0.146）では有意でない、という3点から、確証的な所見としては扱わず「探索的」と明記した。</a:t>
+            </a:r>
+          </a:p>
+          <a:p/>
+          <a:p>
+            <a:r>
+              <a:t>【結論】</a:t>
+            </a:r>
+          </a:p>
+          <a:p>
+            <a:r>
+              <a:t>主要な解析（結果2・結果4・結果5）はいずれも一貫して有意差なしであり、これは検出力不足ではなく先行研究と整合する頑健な陰性所見として提示できる。</a:t>
             </a:r>
           </a:p>
         </p:txBody>
@@ -4638,9 +4749,84 @@
           </a:p>
         </p:txBody>
       </p:sp>
+      <p:sp>
+        <p:nvSpPr>
+          <p:cNvPr id="5" name="Rectangle 4"/>
+          <p:cNvSpPr/>
+          <p:nvPr/>
+        </p:nvSpPr>
+        <p:spPr>
+          <a:xfrm>
+            <a:off x="457200" y="1520000"/>
+            <a:ext cx="11247120" cy="420000"/>
+          </a:xfrm>
+          <a:prstGeom prst="rect">
+            <a:avLst/>
+          </a:prstGeom>
+          <a:solidFill>
+            <a:srgbClr val="F2F2F2"/>
+          </a:solidFill>
+          <a:ln w="12700">
+            <a:solidFill>
+              <a:srgbClr val="888888"/>
+            </a:solidFill>
+          </a:ln>
+          <a:effectLst/>
+        </p:spPr>
+        <p:style>
+          <a:lnRef idx="1">
+            <a:schemeClr val="accent1"/>
+          </a:lnRef>
+          <a:fillRef idx="3">
+            <a:schemeClr val="accent1"/>
+          </a:fillRef>
+          <a:effectRef idx="2">
+            <a:schemeClr val="accent1"/>
+          </a:effectRef>
+          <a:fontRef idx="minor">
+            <a:schemeClr val="lt1"/>
+          </a:fontRef>
+        </p:style>
+        <p:txBody>
+          <a:bodyPr rtlCol="0" anchor="ctr" wrap="square" lIns="130000" rIns="130000" tIns="45000" bIns="45000"/>
+          <a:lstStyle/>
+          <a:p>
+            <a:pPr algn="ctr"/>
+            <a:r>
+              <a:rPr sz="1500" b="1">
+                <a:solidFill>
+                  <a:srgbClr val="404040"/>
+                </a:solidFill>
+                <a:latin typeface="Arial"/>
+                <a:ea typeface="Arial"/>
+                <a:cs typeface="Arial"/>
+              </a:rPr>
+              <a:t>判定：有意差なし（各時点とも p &gt; 0.05）</a:t>
+            </a:r>
+          </a:p>
+          <a:p>
+            <a:pPr>
+              <a:lnSpc>
+                <a:spcPct val="100000"/>
+              </a:lnSpc>
+            </a:pPr>
+            <a:r>
+              <a:rPr sz="1150" b="0">
+                <a:solidFill>
+                  <a:srgbClr val="404040"/>
+                </a:solidFill>
+                <a:latin typeface="Arial"/>
+                <a:ea typeface="Arial"/>
+                <a:cs typeface="Arial"/>
+              </a:rPr>
+              <a:t>18か月時点のΔMMSE　Welchのt検定 p = 0.581／Mann-Whitney検定 p = 0.200（訴えあり n=9／なし n=20）</a:t>
+            </a:r>
+          </a:p>
+        </p:txBody>
+      </p:sp>
       <p:pic>
         <p:nvPicPr>
-          <p:cNvPr id="5" name="Picture 4" descr="slide_ΔMMSE_アンカー別推移.png"/>
+          <p:cNvPr id="6" name="Picture 5" descr="slide_ΔMMSE_アンカー別推移.png"/>
           <p:cNvPicPr>
             <a:picLocks noChangeAspect="1"/>
           </p:cNvPicPr>
@@ -4654,8 +4840,8 @@
         </p:blipFill>
         <p:spPr>
           <a:xfrm>
-            <a:off x="457200" y="1646899"/>
-            <a:ext cx="11247120" cy="4067121"/>
+            <a:off x="908512" y="2020000"/>
+            <a:ext cx="10344496" cy="3740720"/>
           </a:xfrm>
           <a:prstGeom prst="rect">
             <a:avLst/>
@@ -4664,7 +4850,7 @@
       </p:pic>
       <p:sp>
         <p:nvSpPr>
-          <p:cNvPr id="6" name="TextBox 5"/>
+          <p:cNvPr id="7" name="TextBox 6"/>
           <p:cNvSpPr txBox="1"/>
           <p:nvPr/>
         </p:nvSpPr>
@@ -4885,9 +5071,84 @@
           </a:p>
         </p:txBody>
       </p:sp>
+      <p:sp>
+        <p:nvSpPr>
+          <p:cNvPr id="5" name="Rectangle 4"/>
+          <p:cNvSpPr/>
+          <p:nvPr/>
+        </p:nvSpPr>
+        <p:spPr>
+          <a:xfrm>
+            <a:off x="457200" y="1520000"/>
+            <a:ext cx="11247120" cy="420000"/>
+          </a:xfrm>
+          <a:prstGeom prst="rect">
+            <a:avLst/>
+          </a:prstGeom>
+          <a:solidFill>
+            <a:srgbClr val="FFF2CC"/>
+          </a:solidFill>
+          <a:ln w="12700">
+            <a:solidFill>
+              <a:srgbClr val="BF8F00"/>
+            </a:solidFill>
+          </a:ln>
+          <a:effectLst/>
+        </p:spPr>
+        <p:style>
+          <a:lnRef idx="1">
+            <a:schemeClr val="accent1"/>
+          </a:lnRef>
+          <a:fillRef idx="3">
+            <a:schemeClr val="accent1"/>
+          </a:fillRef>
+          <a:effectRef idx="2">
+            <a:schemeClr val="accent1"/>
+          </a:effectRef>
+          <a:fontRef idx="minor">
+            <a:schemeClr val="lt1"/>
+          </a:fontRef>
+        </p:style>
+        <p:txBody>
+          <a:bodyPr rtlCol="0" anchor="ctr" wrap="square" lIns="130000" rIns="130000" tIns="45000" bIns="45000"/>
+          <a:lstStyle/>
+          <a:p>
+            <a:pPr algn="ctr"/>
+            <a:r>
+              <a:rPr sz="1500" b="1">
+                <a:solidFill>
+                  <a:srgbClr val="7F6000"/>
+                </a:solidFill>
+                <a:latin typeface="Arial"/>
+                <a:ea typeface="Arial"/>
+                <a:cs typeface="Arial"/>
+              </a:rPr>
+              <a:t>判定：個人内変動幅は有意差あり（探索的）／分散(Levene)は有意差なし</a:t>
+            </a:r>
+          </a:p>
+          <a:p>
+            <a:pPr>
+              <a:lnSpc>
+                <a:spcPct val="100000"/>
+              </a:lnSpc>
+            </a:pPr>
+            <a:r>
+              <a:rPr sz="1150" b="0">
+                <a:solidFill>
+                  <a:srgbClr val="7F6000"/>
+                </a:solidFill>
+                <a:latin typeface="Arial"/>
+                <a:ea typeface="Arial"/>
+                <a:cs typeface="Arial"/>
+              </a:rPr>
+              <a:t>変動幅の中央値差　Mann-Whitney検定 p = 0.034　｜　Δ18MのSD比較　Levene検定 p = 0.146（n=9 vs 20、多重比較未補正）</a:t>
+            </a:r>
+          </a:p>
+        </p:txBody>
+      </p:sp>
       <p:pic>
         <p:nvPicPr>
-          <p:cNvPr id="5" name="Picture 4" descr="slide_個別症例MMSE推移_重ね合わせ.png"/>
+          <p:cNvPr id="6" name="Picture 5" descr="slide_個別症例MMSE推移_重ね合わせ.png"/>
           <p:cNvPicPr>
             <a:picLocks noChangeAspect="1"/>
           </p:cNvPicPr>
@@ -4901,8 +5162,8 @@
         </p:blipFill>
         <p:spPr>
           <a:xfrm>
-            <a:off x="457200" y="1646899"/>
-            <a:ext cx="11247120" cy="4067121"/>
+            <a:off x="908512" y="2020000"/>
+            <a:ext cx="10344496" cy="3740720"/>
           </a:xfrm>
           <a:prstGeom prst="rect">
             <a:avLst/>
@@ -4911,7 +5172,7 @@
       </p:pic>
       <p:sp>
         <p:nvSpPr>
-          <p:cNvPr id="6" name="TextBox 5"/>
+          <p:cNvPr id="7" name="TextBox 6"/>
           <p:cNvSpPr txBox="1"/>
           <p:nvPr/>
         </p:nvSpPr>
@@ -4963,7 +5224,7 @@
                 <a:ea typeface="Arial"/>
                 <a:cs typeface="Arial"/>
               </a:rPr>
-              <a:t>個人内の変動幅（4時点の最大−最小）の平均は 訴えあり 4.67点／訴えなし 3.05点。18か月時点のΔMMSEの標準偏差は 訴えあり 4.76／訴えなし 2.83。</a:t>
+              <a:t>個人内の変動幅（4時点の最大−最小）の平均は 訴えあり 4.67点／訴えなし 3.05点（Mann-Whitney p=0.034）。Δ18MのSDは 訴えあり 4.76／訴えなし 2.83（Levene検定 p=0.146）。</a:t>
             </a:r>
           </a:p>
           <a:p>
@@ -5132,9 +5393,84 @@
           </a:p>
         </p:txBody>
       </p:sp>
+      <p:sp>
+        <p:nvSpPr>
+          <p:cNvPr id="5" name="Rectangle 4"/>
+          <p:cNvSpPr/>
+          <p:nvPr/>
+        </p:nvSpPr>
+        <p:spPr>
+          <a:xfrm>
+            <a:off x="457200" y="1520000"/>
+            <a:ext cx="11247120" cy="420000"/>
+          </a:xfrm>
+          <a:prstGeom prst="rect">
+            <a:avLst/>
+          </a:prstGeom>
+          <a:solidFill>
+            <a:srgbClr val="F2F2F2"/>
+          </a:solidFill>
+          <a:ln w="12700">
+            <a:solidFill>
+              <a:srgbClr val="888888"/>
+            </a:solidFill>
+          </a:ln>
+          <a:effectLst/>
+        </p:spPr>
+        <p:style>
+          <a:lnRef idx="1">
+            <a:schemeClr val="accent1"/>
+          </a:lnRef>
+          <a:fillRef idx="3">
+            <a:schemeClr val="accent1"/>
+          </a:fillRef>
+          <a:effectRef idx="2">
+            <a:schemeClr val="accent1"/>
+          </a:effectRef>
+          <a:fontRef idx="minor">
+            <a:schemeClr val="lt1"/>
+          </a:fontRef>
+        </p:style>
+        <p:txBody>
+          <a:bodyPr rtlCol="0" anchor="ctr" wrap="square" lIns="130000" rIns="130000" tIns="45000" bIns="45000"/>
+          <a:lstStyle/>
+          <a:p>
+            <a:pPr algn="ctr"/>
+            <a:r>
+              <a:rPr sz="1500" b="1">
+                <a:solidFill>
+                  <a:srgbClr val="404040"/>
+                </a:solidFill>
+                <a:latin typeface="Arial"/>
+                <a:ea typeface="Arial"/>
+                <a:cs typeface="Arial"/>
+              </a:rPr>
+              <a:t>判定：MMSE下位項目 11/11・CDR 6/6 いずれも有意差なし</a:t>
+            </a:r>
+          </a:p>
+          <a:p>
+            <a:pPr>
+              <a:lnSpc>
+                <a:spcPct val="100000"/>
+              </a:lnSpc>
+            </a:pPr>
+            <a:r>
+              <a:rPr sz="1150" b="0">
+                <a:solidFill>
+                  <a:srgbClr val="404040"/>
+                </a:solidFill>
+                <a:latin typeface="Arial"/>
+                <a:ea typeface="Arial"/>
+                <a:cs typeface="Arial"/>
+              </a:rPr>
+              <a:t>MMSE下位項目 最小 p = 0.157（FDR補正後 最小 q = 0.778）／CDR6領域 最小 p = 0.598。補正前の段階から有意な項目はゼロ。</a:t>
+            </a:r>
+          </a:p>
+        </p:txBody>
+      </p:sp>
       <p:pic>
         <p:nvPicPr>
-          <p:cNvPr id="5" name="Picture 4" descr="slide_MMSE下位項目パネル.png"/>
+          <p:cNvPr id="6" name="Picture 5" descr="slide_MMSE下位項目パネル.png"/>
           <p:cNvPicPr>
             <a:picLocks noChangeAspect="1"/>
           </p:cNvPicPr>
@@ -5148,8 +5484,8 @@
         </p:blipFill>
         <p:spPr>
           <a:xfrm>
-            <a:off x="457200" y="1606930"/>
-            <a:ext cx="11247120" cy="4147059"/>
+            <a:off x="1008211" y="2020000"/>
+            <a:ext cx="10145097" cy="3740720"/>
           </a:xfrm>
           <a:prstGeom prst="rect">
             <a:avLst/>
@@ -5158,7 +5494,7 @@
       </p:pic>
       <p:sp>
         <p:nvSpPr>
-          <p:cNvPr id="6" name="TextBox 5"/>
+          <p:cNvPr id="7" name="TextBox 6"/>
           <p:cNvSpPr txBox="1"/>
           <p:nvPr/>
         </p:nvSpPr>
@@ -5379,9 +5715,84 @@
           </a:p>
         </p:txBody>
       </p:sp>
+      <p:sp>
+        <p:nvSpPr>
+          <p:cNvPr id="5" name="Rectangle 4"/>
+          <p:cNvSpPr/>
+          <p:nvPr/>
+        </p:nvSpPr>
+        <p:spPr>
+          <a:xfrm>
+            <a:off x="457200" y="1520000"/>
+            <a:ext cx="11247120" cy="420000"/>
+          </a:xfrm>
+          <a:prstGeom prst="rect">
+            <a:avLst/>
+          </a:prstGeom>
+          <a:solidFill>
+            <a:srgbClr val="FFF2CC"/>
+          </a:solidFill>
+          <a:ln w="12700">
+            <a:solidFill>
+              <a:srgbClr val="BF8F00"/>
+            </a:solidFill>
+          </a:ln>
+          <a:effectLst/>
+        </p:spPr>
+        <p:style>
+          <a:lnRef idx="1">
+            <a:schemeClr val="accent1"/>
+          </a:lnRef>
+          <a:fillRef idx="3">
+            <a:schemeClr val="accent1"/>
+          </a:fillRef>
+          <a:effectRef idx="2">
+            <a:schemeClr val="accent1"/>
+          </a:effectRef>
+          <a:fontRef idx="minor">
+            <a:schemeClr val="lt1"/>
+          </a:fontRef>
+        </p:style>
+        <p:txBody>
+          <a:bodyPr rtlCol="0" anchor="ctr" wrap="square" lIns="130000" rIns="130000" tIns="45000" bIns="45000"/>
+          <a:lstStyle/>
+          <a:p>
+            <a:pPr algn="ctr"/>
+            <a:r>
+              <a:rPr sz="1500" b="1">
+                <a:solidFill>
+                  <a:srgbClr val="7F6000"/>
+                </a:solidFill>
+                <a:latin typeface="Arial"/>
+                <a:ea typeface="Arial"/>
+                <a:cs typeface="Arial"/>
+              </a:rPr>
+              <a:t>判定：結果3と同一データの検定結果（詳細は結果3を参照）</a:t>
+            </a:r>
+          </a:p>
+          <a:p>
+            <a:pPr>
+              <a:lnSpc>
+                <a:spcPct val="100000"/>
+              </a:lnSpc>
+            </a:pPr>
+            <a:r>
+              <a:rPr sz="1150" b="0">
+                <a:solidFill>
+                  <a:srgbClr val="7F6000"/>
+                </a:solidFill>
+                <a:latin typeface="Arial"/>
+                <a:ea typeface="Arial"/>
+                <a:cs typeface="Arial"/>
+              </a:rPr>
+              <a:t>個人内変動幅　Mann-Whitney検定 p = 0.034（探索的）　｜　Δ18MのSD　Levene検定 p = 0.146（有意差なし）</a:t>
+            </a:r>
+          </a:p>
+        </p:txBody>
+      </p:sp>
       <p:pic>
         <p:nvPicPr>
-          <p:cNvPr id="5" name="Picture 4" descr="slide_個別症例MMSE推移_群別2パネル.png"/>
+          <p:cNvPr id="6" name="Picture 5" descr="slide_個別症例MMSE推移_群別2パネル.png"/>
           <p:cNvPicPr>
             <a:picLocks noChangeAspect="1"/>
           </p:cNvPicPr>
@@ -5395,8 +5806,8 @@
         </p:blipFill>
         <p:spPr>
           <a:xfrm>
-            <a:off x="457200" y="1646899"/>
-            <a:ext cx="11247120" cy="4067121"/>
+            <a:off x="908512" y="2020000"/>
+            <a:ext cx="10344496" cy="3740720"/>
           </a:xfrm>
           <a:prstGeom prst="rect">
             <a:avLst/>
@@ -5405,7 +5816,7 @@
       </p:pic>
       <p:sp>
         <p:nvSpPr>
-          <p:cNvPr id="6" name="TextBox 5"/>
+          <p:cNvPr id="7" name="TextBox 6"/>
           <p:cNvSpPr txBox="1"/>
           <p:nvPr/>
         </p:nvSpPr>
@@ -5608,9 +6019,84 @@
           </a:p>
         </p:txBody>
       </p:sp>
+      <p:sp>
+        <p:nvSpPr>
+          <p:cNvPr id="5" name="Rectangle 4"/>
+          <p:cNvSpPr/>
+          <p:nvPr/>
+        </p:nvSpPr>
+        <p:spPr>
+          <a:xfrm>
+            <a:off x="457200" y="1520000"/>
+            <a:ext cx="11247120" cy="420000"/>
+          </a:xfrm>
+          <a:prstGeom prst="rect">
+            <a:avLst/>
+          </a:prstGeom>
+          <a:solidFill>
+            <a:srgbClr val="FDE9D9"/>
+          </a:solidFill>
+          <a:ln w="12700">
+            <a:solidFill>
+              <a:srgbClr val="C55A11"/>
+            </a:solidFill>
+          </a:ln>
+          <a:effectLst/>
+        </p:spPr>
+        <p:style>
+          <a:lnRef idx="1">
+            <a:schemeClr val="accent1"/>
+          </a:lnRef>
+          <a:fillRef idx="3">
+            <a:schemeClr val="accent1"/>
+          </a:fillRef>
+          <a:effectRef idx="2">
+            <a:schemeClr val="accent1"/>
+          </a:effectRef>
+          <a:fontRef idx="minor">
+            <a:schemeClr val="lt1"/>
+          </a:fontRef>
+        </p:style>
+        <p:txBody>
+          <a:bodyPr rtlCol="0" anchor="ctr" wrap="square" lIns="130000" rIns="130000" tIns="45000" bIns="45000"/>
+          <a:lstStyle/>
+          <a:p>
+            <a:pPr algn="ctr"/>
+            <a:r>
+              <a:rPr sz="1500" b="1">
+                <a:solidFill>
+                  <a:srgbClr val="7A3508"/>
+                </a:solidFill>
+                <a:latin typeface="Arial"/>
+                <a:ea typeface="Arial"/>
+                <a:cs typeface="Arial"/>
+              </a:rPr>
+              <a:t>判定：相関は統計的に有意（ただし平均への回帰を含み因果解釈は不可）</a:t>
+            </a:r>
+          </a:p>
+          <a:p>
+            <a:pPr>
+              <a:lnSpc>
+                <a:spcPct val="100000"/>
+              </a:lnSpc>
+            </a:pPr>
+            <a:r>
+              <a:rPr sz="1150" b="0">
+                <a:solidFill>
+                  <a:srgbClr val="7A3508"/>
+                </a:solidFill>
+                <a:latin typeface="Arial"/>
+                <a:ea typeface="Arial"/>
+                <a:cs typeface="Arial"/>
+              </a:rPr>
+              <a:t>ベースラインMMSEと18か月ΔMMSEの相関（29例）　Pearson相関 r = −0.50, p = 0.006</a:t>
+            </a:r>
+          </a:p>
+        </p:txBody>
+      </p:sp>
       <p:pic>
         <p:nvPicPr>
-          <p:cNvPr id="5" name="Picture 4" descr="slide_18か月ΔMMSE_ドットプロット.png"/>
+          <p:cNvPr id="6" name="Picture 5" descr="slide_18か月ΔMMSE_ドットプロット.png"/>
           <p:cNvPicPr>
             <a:picLocks noChangeAspect="1"/>
           </p:cNvPicPr>
@@ -5624,8 +6110,8 @@
         </p:blipFill>
         <p:spPr>
           <a:xfrm>
-            <a:off x="457200" y="1646899"/>
-            <a:ext cx="11247120" cy="4067121"/>
+            <a:off x="908512" y="2020000"/>
+            <a:ext cx="10344496" cy="3740720"/>
           </a:xfrm>
           <a:prstGeom prst="rect">
             <a:avLst/>
@@ -5634,7 +6120,7 @@
       </p:pic>
       <p:sp>
         <p:nvSpPr>
-          <p:cNvPr id="6" name="TextBox 5"/>
+          <p:cNvPr id="7" name="TextBox 6"/>
           <p:cNvSpPr txBox="1"/>
           <p:nvPr/>
         </p:nvSpPr>
@@ -6180,6 +6666,2469 @@
                 <a:cs typeface="Arial"/>
               </a:rPr>
               <a:t>　群分け変数（症状改善の訴え）も記載依存であり、共通の記載バイアスは見かけの関連を生む方向にも消す方向にも働きうる。</a:t>
+            </a:r>
+          </a:p>
+        </p:txBody>
+      </p:sp>
+    </p:spTree>
+  </p:cSld>
+  <p:clrMapOvr>
+    <a:masterClrMapping/>
+  </p:clrMapOvr>
+</p:sld>
+</file>
+
+<file path=ppt/slides/slide9.xml><?xml version="1.0" encoding="utf-8"?>
+<p:sld xmlns:a="http://schemas.openxmlformats.org/drawingml/2006/main" xmlns:p="http://schemas.openxmlformats.org/presentationml/2006/main" xmlns:r="http://schemas.openxmlformats.org/officeDocument/2006/relationships">
+  <p:cSld>
+    <p:spTree>
+      <p:nvGrpSpPr>
+        <p:cNvPr id="1" name=""/>
+        <p:cNvGrpSpPr/>
+        <p:nvPr/>
+      </p:nvGrpSpPr>
+      <p:grpSpPr/>
+      <p:sp>
+        <p:nvSpPr>
+          <p:cNvPr id="2" name="TextBox 1"/>
+          <p:cNvSpPr txBox="1"/>
+          <p:nvPr/>
+        </p:nvSpPr>
+        <p:spPr>
+          <a:xfrm>
+            <a:off x="457200" y="292608"/>
+            <a:ext cx="11247120" cy="566928"/>
+          </a:xfrm>
+          <a:prstGeom prst="rect">
+            <a:avLst/>
+          </a:prstGeom>
+          <a:noFill/>
+        </p:spPr>
+        <p:txBody>
+          <a:bodyPr wrap="square" lIns="0" rIns="0" tIns="0" bIns="0">
+            <a:spAutoFit/>
+          </a:bodyPr>
+          <a:lstStyle/>
+          <a:p>
+            <a:pPr>
+              <a:lnSpc>
+                <a:spcPct val="105000"/>
+              </a:lnSpc>
+            </a:pPr>
+            <a:r>
+              <a:rPr sz="3600" b="1">
+                <a:solidFill>
+                  <a:srgbClr val="000000"/>
+                </a:solidFill>
+                <a:latin typeface="Arial"/>
+                <a:ea typeface="Arial"/>
+                <a:cs typeface="Arial"/>
+              </a:rPr>
+              <a:t>統計結果まとめ</a:t>
+            </a:r>
+          </a:p>
+        </p:txBody>
+      </p:sp>
+      <p:cxnSp>
+        <p:nvCxnSpPr>
+          <p:cNvPr id="3" name="Connector 2"/>
+          <p:cNvCxnSpPr/>
+          <p:nvPr/>
+        </p:nvCxnSpPr>
+        <p:spPr>
+          <a:xfrm>
+            <a:off x="457200" y="1161288"/>
+            <a:ext cx="10817352" cy="0"/>
+          </a:xfrm>
+          <a:prstGeom prst="line">
+            <a:avLst/>
+          </a:prstGeom>
+          <a:ln w="22225">
+            <a:solidFill>
+              <a:srgbClr val="156082"/>
+            </a:solidFill>
+          </a:ln>
+        </p:spPr>
+        <p:style>
+          <a:lnRef idx="2">
+            <a:schemeClr val="accent1"/>
+          </a:lnRef>
+          <a:fillRef idx="0">
+            <a:schemeClr val="accent1"/>
+          </a:fillRef>
+          <a:effectRef idx="1">
+            <a:schemeClr val="accent1"/>
+          </a:effectRef>
+          <a:fontRef idx="minor">
+            <a:schemeClr val="tx1"/>
+          </a:fontRef>
+        </p:style>
+      </p:cxnSp>
+      <p:sp>
+        <p:nvSpPr>
+          <p:cNvPr id="4" name="TextBox 3"/>
+          <p:cNvSpPr txBox="1"/>
+          <p:nvPr/>
+        </p:nvSpPr>
+        <p:spPr>
+          <a:xfrm>
+            <a:off x="457200" y="1243584"/>
+            <a:ext cx="11247120" cy="246888"/>
+          </a:xfrm>
+          <a:prstGeom prst="rect">
+            <a:avLst/>
+          </a:prstGeom>
+          <a:noFill/>
+        </p:spPr>
+        <p:txBody>
+          <a:bodyPr wrap="square" lIns="0" rIns="0" tIns="0" bIns="0">
+            <a:spAutoFit/>
+          </a:bodyPr>
+          <a:lstStyle/>
+          <a:p>
+            <a:pPr>
+              <a:lnSpc>
+                <a:spcPct val="105000"/>
+              </a:lnSpc>
+            </a:pPr>
+            <a:r>
+              <a:rPr sz="1300" b="0">
+                <a:solidFill>
+                  <a:srgbClr val="666666"/>
+                </a:solidFill>
+                <a:latin typeface="Arial"/>
+                <a:ea typeface="Arial"/>
+                <a:cs typeface="Arial"/>
+              </a:rPr>
+              <a:t>結果2〜5・参考2で行った統計検定の一覧。上野先生への一目でのご確認用。</a:t>
+            </a:r>
+          </a:p>
+        </p:txBody>
+      </p:sp>
+      <p:graphicFrame>
+        <p:nvGraphicFramePr>
+          <p:cNvPr id="5" name="Table 4"/>
+          <p:cNvGraphicFramePr>
+            <a:graphicFrameLocks noGrp="1"/>
+          </p:cNvGraphicFramePr>
+          <p:nvPr/>
+        </p:nvGraphicFramePr>
+        <p:xfrm>
+          <a:off x="457200" y="1560000"/>
+          <a:ext cx="11247120" cy="4200000"/>
+        </p:xfrm>
+        <a:graphic>
+          <a:graphicData uri="http://schemas.openxmlformats.org/drawingml/2006/table">
+            <a:tbl>
+              <a:tblPr>
+                <a:tableStyleId>{5C22544A-7EE6-4342-B048-85BDC9FD1C3A}</a:tableStyleId>
+              </a:tblPr>
+              <a:tblGrid>
+                <a:gridCol w="1143000"/>
+                <a:gridCol w="3520440"/>
+                <a:gridCol w="2331720"/>
+                <a:gridCol w="1965960"/>
+                <a:gridCol w="2286000"/>
+              </a:tblGrid>
+              <a:tr h="330000">
+                <a:tc>
+                  <a:txBody>
+                    <a:bodyPr wrap="square"/>
+                    <a:lstStyle/>
+                    <a:p>
+                      <a:pPr algn="ctr"/>
+                      <a:r>
+                        <a:rPr sz="1200" b="1">
+                          <a:solidFill>
+                            <a:srgbClr val="000000"/>
+                          </a:solidFill>
+                          <a:latin typeface="Arial"/>
+                          <a:ea typeface="Arial"/>
+                          <a:cs typeface="Arial"/>
+                        </a:rPr>
+                        <a:t>対象スライド</a:t>
+                      </a:r>
+                    </a:p>
+                  </a:txBody>
+                  <a:tcPr marL="91440" marR="91440" marT="36576" marB="36576">
+                    <a:lnL cap="flat" cmpd="sng" algn="ctr" w="0">
+                      <a:noFill/>
+                    </a:lnL>
+                    <a:lnR cap="flat" cmpd="sng" algn="ctr" w="0">
+                      <a:noFill/>
+                    </a:lnR>
+                    <a:lnT cap="flat" cmpd="sng" algn="ctr" w="0">
+                      <a:noFill/>
+                    </a:lnT>
+                    <a:lnB cap="flat" cmpd="sng" algn="ctr" w="9525">
+                      <a:solidFill>
+                        <a:srgbClr val="999999"/>
+                      </a:solidFill>
+                      <a:prstDash val="solid"/>
+                    </a:lnB>
+                    <a:solidFill>
+                      <a:srgbClr val="FFFFFF"/>
+                    </a:solidFill>
+                  </a:tcPr>
+                </a:tc>
+                <a:tc>
+                  <a:txBody>
+                    <a:bodyPr wrap="square"/>
+                    <a:lstStyle/>
+                    <a:p>
+                      <a:pPr algn="ctr"/>
+                      <a:r>
+                        <a:rPr sz="1200" b="1">
+                          <a:solidFill>
+                            <a:srgbClr val="000000"/>
+                          </a:solidFill>
+                          <a:latin typeface="Arial"/>
+                          <a:ea typeface="Arial"/>
+                          <a:cs typeface="Arial"/>
+                        </a:rPr>
+                        <a:t>比較・解析</a:t>
+                      </a:r>
+                    </a:p>
+                  </a:txBody>
+                  <a:tcPr marL="91440" marR="91440" marT="36576" marB="36576">
+                    <a:lnL cap="flat" cmpd="sng" algn="ctr" w="0">
+                      <a:noFill/>
+                    </a:lnL>
+                    <a:lnR cap="flat" cmpd="sng" algn="ctr" w="0">
+                      <a:noFill/>
+                    </a:lnR>
+                    <a:lnT cap="flat" cmpd="sng" algn="ctr" w="0">
+                      <a:noFill/>
+                    </a:lnT>
+                    <a:lnB cap="flat" cmpd="sng" algn="ctr" w="9525">
+                      <a:solidFill>
+                        <a:srgbClr val="999999"/>
+                      </a:solidFill>
+                      <a:prstDash val="solid"/>
+                    </a:lnB>
+                    <a:solidFill>
+                      <a:srgbClr val="FFFFFF"/>
+                    </a:solidFill>
+                  </a:tcPr>
+                </a:tc>
+                <a:tc>
+                  <a:txBody>
+                    <a:bodyPr wrap="square"/>
+                    <a:lstStyle/>
+                    <a:p>
+                      <a:pPr algn="ctr"/>
+                      <a:r>
+                        <a:rPr sz="1200" b="1">
+                          <a:solidFill>
+                            <a:srgbClr val="000000"/>
+                          </a:solidFill>
+                          <a:latin typeface="Arial"/>
+                          <a:ea typeface="Arial"/>
+                          <a:cs typeface="Arial"/>
+                        </a:rPr>
+                        <a:t>検定</a:t>
+                      </a:r>
+                    </a:p>
+                  </a:txBody>
+                  <a:tcPr marL="91440" marR="91440" marT="36576" marB="36576">
+                    <a:lnL cap="flat" cmpd="sng" algn="ctr" w="0">
+                      <a:noFill/>
+                    </a:lnL>
+                    <a:lnR cap="flat" cmpd="sng" algn="ctr" w="0">
+                      <a:noFill/>
+                    </a:lnR>
+                    <a:lnT cap="flat" cmpd="sng" algn="ctr" w="0">
+                      <a:noFill/>
+                    </a:lnT>
+                    <a:lnB cap="flat" cmpd="sng" algn="ctr" w="9525">
+                      <a:solidFill>
+                        <a:srgbClr val="999999"/>
+                      </a:solidFill>
+                      <a:prstDash val="solid"/>
+                    </a:lnB>
+                    <a:solidFill>
+                      <a:srgbClr val="FFFFFF"/>
+                    </a:solidFill>
+                  </a:tcPr>
+                </a:tc>
+                <a:tc>
+                  <a:txBody>
+                    <a:bodyPr wrap="square"/>
+                    <a:lstStyle/>
+                    <a:p>
+                      <a:pPr algn="ctr"/>
+                      <a:r>
+                        <a:rPr sz="1200" b="1">
+                          <a:solidFill>
+                            <a:srgbClr val="000000"/>
+                          </a:solidFill>
+                          <a:latin typeface="Arial"/>
+                          <a:ea typeface="Arial"/>
+                          <a:cs typeface="Arial"/>
+                        </a:rPr>
+                        <a:t>統計量／p値</a:t>
+                      </a:r>
+                    </a:p>
+                  </a:txBody>
+                  <a:tcPr marL="91440" marR="91440" marT="36576" marB="36576">
+                    <a:lnL cap="flat" cmpd="sng" algn="ctr" w="0">
+                      <a:noFill/>
+                    </a:lnL>
+                    <a:lnR cap="flat" cmpd="sng" algn="ctr" w="0">
+                      <a:noFill/>
+                    </a:lnR>
+                    <a:lnT cap="flat" cmpd="sng" algn="ctr" w="0">
+                      <a:noFill/>
+                    </a:lnT>
+                    <a:lnB cap="flat" cmpd="sng" algn="ctr" w="9525">
+                      <a:solidFill>
+                        <a:srgbClr val="999999"/>
+                      </a:solidFill>
+                      <a:prstDash val="solid"/>
+                    </a:lnB>
+                    <a:solidFill>
+                      <a:srgbClr val="FFFFFF"/>
+                    </a:solidFill>
+                  </a:tcPr>
+                </a:tc>
+                <a:tc>
+                  <a:txBody>
+                    <a:bodyPr wrap="square"/>
+                    <a:lstStyle/>
+                    <a:p>
+                      <a:pPr algn="ctr"/>
+                      <a:r>
+                        <a:rPr sz="1200" b="1">
+                          <a:solidFill>
+                            <a:srgbClr val="000000"/>
+                          </a:solidFill>
+                          <a:latin typeface="Arial"/>
+                          <a:ea typeface="Arial"/>
+                          <a:cs typeface="Arial"/>
+                        </a:rPr>
+                        <a:t>判定</a:t>
+                      </a:r>
+                    </a:p>
+                  </a:txBody>
+                  <a:tcPr marL="91440" marR="91440" marT="36576" marB="36576">
+                    <a:lnL cap="flat" cmpd="sng" algn="ctr" w="0">
+                      <a:noFill/>
+                    </a:lnL>
+                    <a:lnR cap="flat" cmpd="sng" algn="ctr" w="0">
+                      <a:noFill/>
+                    </a:lnR>
+                    <a:lnT cap="flat" cmpd="sng" algn="ctr" w="0">
+                      <a:noFill/>
+                    </a:lnT>
+                    <a:lnB cap="flat" cmpd="sng" algn="ctr" w="9525">
+                      <a:solidFill>
+                        <a:srgbClr val="999999"/>
+                      </a:solidFill>
+                      <a:prstDash val="solid"/>
+                    </a:lnB>
+                    <a:solidFill>
+                      <a:srgbClr val="FFFFFF"/>
+                    </a:solidFill>
+                  </a:tcPr>
+                </a:tc>
+              </a:tr>
+              <a:tr h="387000">
+                <a:tc>
+                  <a:txBody>
+                    <a:bodyPr wrap="square"/>
+                    <a:lstStyle/>
+                    <a:p>
+                      <a:pPr algn="ctr"/>
+                      <a:r>
+                        <a:rPr sz="1100" b="1">
+                          <a:solidFill>
+                            <a:srgbClr val="1A1A1A"/>
+                          </a:solidFill>
+                          <a:latin typeface="Arial"/>
+                          <a:ea typeface="Arial"/>
+                          <a:cs typeface="Arial"/>
+                        </a:rPr>
+                        <a:t>結果2</a:t>
+                      </a:r>
+                    </a:p>
+                  </a:txBody>
+                  <a:tcPr marL="91440" marR="91440" marT="36576" marB="36576">
+                    <a:lnL cap="flat" cmpd="sng" algn="ctr" w="0">
+                      <a:noFill/>
+                    </a:lnL>
+                    <a:lnR cap="flat" cmpd="sng" algn="ctr" w="0">
+                      <a:noFill/>
+                    </a:lnR>
+                    <a:lnT cap="flat" cmpd="sng" algn="ctr" w="0">
+                      <a:noFill/>
+                    </a:lnT>
+                    <a:lnB cap="flat" cmpd="sng" algn="ctr" w="9525">
+                      <a:solidFill>
+                        <a:srgbClr val="999999"/>
+                      </a:solidFill>
+                      <a:prstDash val="solid"/>
+                    </a:lnB>
+                    <a:solidFill>
+                      <a:srgbClr val="FFFFFF"/>
+                    </a:solidFill>
+                  </a:tcPr>
+                </a:tc>
+                <a:tc>
+                  <a:txBody>
+                    <a:bodyPr wrap="square"/>
+                    <a:lstStyle/>
+                    <a:p>
+                      <a:pPr algn="l"/>
+                      <a:r>
+                        <a:rPr sz="1050" b="0">
+                          <a:solidFill>
+                            <a:srgbClr val="1A1A1A"/>
+                          </a:solidFill>
+                          <a:latin typeface="Arial"/>
+                          <a:ea typeface="Arial"/>
+                          <a:cs typeface="Arial"/>
+                        </a:rPr>
+                        <a:t>訴えあり vs なし　18か月時点のΔMMSE</a:t>
+                      </a:r>
+                    </a:p>
+                  </a:txBody>
+                  <a:tcPr marL="91440" marR="91440" marT="36576" marB="36576">
+                    <a:lnL cap="flat" cmpd="sng" algn="ctr" w="0">
+                      <a:noFill/>
+                    </a:lnL>
+                    <a:lnR cap="flat" cmpd="sng" algn="ctr" w="0">
+                      <a:noFill/>
+                    </a:lnR>
+                    <a:lnT cap="flat" cmpd="sng" algn="ctr" w="0">
+                      <a:noFill/>
+                    </a:lnT>
+                    <a:lnB cap="flat" cmpd="sng" algn="ctr" w="9525">
+                      <a:solidFill>
+                        <a:srgbClr val="999999"/>
+                      </a:solidFill>
+                      <a:prstDash val="solid"/>
+                    </a:lnB>
+                    <a:solidFill>
+                      <a:srgbClr val="FFFFFF"/>
+                    </a:solidFill>
+                  </a:tcPr>
+                </a:tc>
+                <a:tc>
+                  <a:txBody>
+                    <a:bodyPr wrap="square"/>
+                    <a:lstStyle/>
+                    <a:p>
+                      <a:pPr algn="l"/>
+                      <a:r>
+                        <a:rPr sz="1050" b="0">
+                          <a:solidFill>
+                            <a:srgbClr val="1A1A1A"/>
+                          </a:solidFill>
+                          <a:latin typeface="Arial"/>
+                          <a:ea typeface="Arial"/>
+                          <a:cs typeface="Arial"/>
+                        </a:rPr>
+                        <a:t>Welchのt検定</a:t>
+                      </a:r>
+                    </a:p>
+                  </a:txBody>
+                  <a:tcPr marL="91440" marR="91440" marT="36576" marB="36576">
+                    <a:lnL cap="flat" cmpd="sng" algn="ctr" w="0">
+                      <a:noFill/>
+                    </a:lnL>
+                    <a:lnR cap="flat" cmpd="sng" algn="ctr" w="0">
+                      <a:noFill/>
+                    </a:lnR>
+                    <a:lnT cap="flat" cmpd="sng" algn="ctr" w="0">
+                      <a:noFill/>
+                    </a:lnT>
+                    <a:lnB cap="flat" cmpd="sng" algn="ctr" w="9525">
+                      <a:solidFill>
+                        <a:srgbClr val="999999"/>
+                      </a:solidFill>
+                      <a:prstDash val="solid"/>
+                    </a:lnB>
+                    <a:solidFill>
+                      <a:srgbClr val="FFFFFF"/>
+                    </a:solidFill>
+                  </a:tcPr>
+                </a:tc>
+                <a:tc>
+                  <a:txBody>
+                    <a:bodyPr wrap="square"/>
+                    <a:lstStyle/>
+                    <a:p>
+                      <a:pPr algn="ctr"/>
+                      <a:r>
+                        <a:rPr sz="1100" b="1">
+                          <a:solidFill>
+                            <a:srgbClr val="1A1A1A"/>
+                          </a:solidFill>
+                          <a:latin typeface="Arial"/>
+                          <a:ea typeface="Arial"/>
+                          <a:cs typeface="Arial"/>
+                        </a:rPr>
+                        <a:t>p = 0.581</a:t>
+                      </a:r>
+                    </a:p>
+                  </a:txBody>
+                  <a:tcPr marL="91440" marR="91440" marT="36576" marB="36576">
+                    <a:lnL cap="flat" cmpd="sng" algn="ctr" w="0">
+                      <a:noFill/>
+                    </a:lnL>
+                    <a:lnR cap="flat" cmpd="sng" algn="ctr" w="0">
+                      <a:noFill/>
+                    </a:lnR>
+                    <a:lnT cap="flat" cmpd="sng" algn="ctr" w="0">
+                      <a:noFill/>
+                    </a:lnT>
+                    <a:lnB cap="flat" cmpd="sng" algn="ctr" w="9525">
+                      <a:solidFill>
+                        <a:srgbClr val="999999"/>
+                      </a:solidFill>
+                      <a:prstDash val="solid"/>
+                    </a:lnB>
+                    <a:solidFill>
+                      <a:srgbClr val="FFFFFF"/>
+                    </a:solidFill>
+                  </a:tcPr>
+                </a:tc>
+                <a:tc>
+                  <a:txBody>
+                    <a:bodyPr wrap="square"/>
+                    <a:lstStyle/>
+                    <a:p>
+                      <a:pPr algn="ctr"/>
+                      <a:r>
+                        <a:rPr sz="1050" b="1">
+                          <a:solidFill>
+                            <a:srgbClr val="404040"/>
+                          </a:solidFill>
+                          <a:latin typeface="Arial"/>
+                          <a:ea typeface="Arial"/>
+                          <a:cs typeface="Arial"/>
+                        </a:rPr>
+                        <a:t>有意差なし</a:t>
+                      </a:r>
+                    </a:p>
+                  </a:txBody>
+                  <a:tcPr marL="91440" marR="91440" marT="36576" marB="36576">
+                    <a:lnL cap="flat" cmpd="sng" algn="ctr" w="0">
+                      <a:noFill/>
+                    </a:lnL>
+                    <a:lnR cap="flat" cmpd="sng" algn="ctr" w="0">
+                      <a:noFill/>
+                    </a:lnR>
+                    <a:lnT cap="flat" cmpd="sng" algn="ctr" w="0">
+                      <a:noFill/>
+                    </a:lnT>
+                    <a:lnB cap="flat" cmpd="sng" algn="ctr" w="9525">
+                      <a:solidFill>
+                        <a:srgbClr val="999999"/>
+                      </a:solidFill>
+                      <a:prstDash val="solid"/>
+                    </a:lnB>
+                    <a:solidFill>
+                      <a:srgbClr val="F2F2F2"/>
+                    </a:solidFill>
+                  </a:tcPr>
+                </a:tc>
+              </a:tr>
+              <a:tr h="387000">
+                <a:tc>
+                  <a:txBody>
+                    <a:bodyPr wrap="square"/>
+                    <a:lstStyle/>
+                    <a:p>
+                      <a:pPr algn="ctr"/>
+                      <a:r>
+                        <a:rPr sz="1100" b="1">
+                          <a:solidFill>
+                            <a:srgbClr val="1A1A1A"/>
+                          </a:solidFill>
+                          <a:latin typeface="Arial"/>
+                          <a:ea typeface="Arial"/>
+                          <a:cs typeface="Arial"/>
+                        </a:rPr>
+                        <a:t>結果2</a:t>
+                      </a:r>
+                    </a:p>
+                  </a:txBody>
+                  <a:tcPr marL="91440" marR="91440" marT="36576" marB="36576">
+                    <a:lnL cap="flat" cmpd="sng" algn="ctr" w="0">
+                      <a:noFill/>
+                    </a:lnL>
+                    <a:lnR cap="flat" cmpd="sng" algn="ctr" w="0">
+                      <a:noFill/>
+                    </a:lnR>
+                    <a:lnT cap="flat" cmpd="sng" algn="ctr" w="0">
+                      <a:noFill/>
+                    </a:lnT>
+                    <a:lnB cap="flat" cmpd="sng" algn="ctr" w="9525">
+                      <a:solidFill>
+                        <a:srgbClr val="999999"/>
+                      </a:solidFill>
+                      <a:prstDash val="solid"/>
+                    </a:lnB>
+                    <a:solidFill>
+                      <a:srgbClr val="FFFFFF"/>
+                    </a:solidFill>
+                  </a:tcPr>
+                </a:tc>
+                <a:tc>
+                  <a:txBody>
+                    <a:bodyPr wrap="square"/>
+                    <a:lstStyle/>
+                    <a:p>
+                      <a:pPr algn="l"/>
+                      <a:r>
+                        <a:rPr sz="1050" b="0">
+                          <a:solidFill>
+                            <a:srgbClr val="1A1A1A"/>
+                          </a:solidFill>
+                          <a:latin typeface="Arial"/>
+                          <a:ea typeface="Arial"/>
+                          <a:cs typeface="Arial"/>
+                        </a:rPr>
+                        <a:t>同上</a:t>
+                      </a:r>
+                    </a:p>
+                  </a:txBody>
+                  <a:tcPr marL="91440" marR="91440" marT="36576" marB="36576">
+                    <a:lnL cap="flat" cmpd="sng" algn="ctr" w="0">
+                      <a:noFill/>
+                    </a:lnL>
+                    <a:lnR cap="flat" cmpd="sng" algn="ctr" w="0">
+                      <a:noFill/>
+                    </a:lnR>
+                    <a:lnT cap="flat" cmpd="sng" algn="ctr" w="0">
+                      <a:noFill/>
+                    </a:lnT>
+                    <a:lnB cap="flat" cmpd="sng" algn="ctr" w="9525">
+                      <a:solidFill>
+                        <a:srgbClr val="999999"/>
+                      </a:solidFill>
+                      <a:prstDash val="solid"/>
+                    </a:lnB>
+                    <a:solidFill>
+                      <a:srgbClr val="FFFFFF"/>
+                    </a:solidFill>
+                  </a:tcPr>
+                </a:tc>
+                <a:tc>
+                  <a:txBody>
+                    <a:bodyPr wrap="square"/>
+                    <a:lstStyle/>
+                    <a:p>
+                      <a:pPr algn="l"/>
+                      <a:r>
+                        <a:rPr sz="1050" b="0">
+                          <a:solidFill>
+                            <a:srgbClr val="1A1A1A"/>
+                          </a:solidFill>
+                          <a:latin typeface="Arial"/>
+                          <a:ea typeface="Arial"/>
+                          <a:cs typeface="Arial"/>
+                        </a:rPr>
+                        <a:t>Mann-Whitney検定</a:t>
+                      </a:r>
+                    </a:p>
+                  </a:txBody>
+                  <a:tcPr marL="91440" marR="91440" marT="36576" marB="36576">
+                    <a:lnL cap="flat" cmpd="sng" algn="ctr" w="0">
+                      <a:noFill/>
+                    </a:lnL>
+                    <a:lnR cap="flat" cmpd="sng" algn="ctr" w="0">
+                      <a:noFill/>
+                    </a:lnR>
+                    <a:lnT cap="flat" cmpd="sng" algn="ctr" w="0">
+                      <a:noFill/>
+                    </a:lnT>
+                    <a:lnB cap="flat" cmpd="sng" algn="ctr" w="9525">
+                      <a:solidFill>
+                        <a:srgbClr val="999999"/>
+                      </a:solidFill>
+                      <a:prstDash val="solid"/>
+                    </a:lnB>
+                    <a:solidFill>
+                      <a:srgbClr val="FFFFFF"/>
+                    </a:solidFill>
+                  </a:tcPr>
+                </a:tc>
+                <a:tc>
+                  <a:txBody>
+                    <a:bodyPr wrap="square"/>
+                    <a:lstStyle/>
+                    <a:p>
+                      <a:pPr algn="ctr"/>
+                      <a:r>
+                        <a:rPr sz="1100" b="1">
+                          <a:solidFill>
+                            <a:srgbClr val="1A1A1A"/>
+                          </a:solidFill>
+                          <a:latin typeface="Arial"/>
+                          <a:ea typeface="Arial"/>
+                          <a:cs typeface="Arial"/>
+                        </a:rPr>
+                        <a:t>p = 0.200</a:t>
+                      </a:r>
+                    </a:p>
+                  </a:txBody>
+                  <a:tcPr marL="91440" marR="91440" marT="36576" marB="36576">
+                    <a:lnL cap="flat" cmpd="sng" algn="ctr" w="0">
+                      <a:noFill/>
+                    </a:lnL>
+                    <a:lnR cap="flat" cmpd="sng" algn="ctr" w="0">
+                      <a:noFill/>
+                    </a:lnR>
+                    <a:lnT cap="flat" cmpd="sng" algn="ctr" w="0">
+                      <a:noFill/>
+                    </a:lnT>
+                    <a:lnB cap="flat" cmpd="sng" algn="ctr" w="9525">
+                      <a:solidFill>
+                        <a:srgbClr val="999999"/>
+                      </a:solidFill>
+                      <a:prstDash val="solid"/>
+                    </a:lnB>
+                    <a:solidFill>
+                      <a:srgbClr val="FFFFFF"/>
+                    </a:solidFill>
+                  </a:tcPr>
+                </a:tc>
+                <a:tc>
+                  <a:txBody>
+                    <a:bodyPr wrap="square"/>
+                    <a:lstStyle/>
+                    <a:p>
+                      <a:pPr algn="ctr"/>
+                      <a:r>
+                        <a:rPr sz="1050" b="1">
+                          <a:solidFill>
+                            <a:srgbClr val="404040"/>
+                          </a:solidFill>
+                          <a:latin typeface="Arial"/>
+                          <a:ea typeface="Arial"/>
+                          <a:cs typeface="Arial"/>
+                        </a:rPr>
+                        <a:t>有意差なし</a:t>
+                      </a:r>
+                    </a:p>
+                  </a:txBody>
+                  <a:tcPr marL="91440" marR="91440" marT="36576" marB="36576">
+                    <a:lnL cap="flat" cmpd="sng" algn="ctr" w="0">
+                      <a:noFill/>
+                    </a:lnL>
+                    <a:lnR cap="flat" cmpd="sng" algn="ctr" w="0">
+                      <a:noFill/>
+                    </a:lnR>
+                    <a:lnT cap="flat" cmpd="sng" algn="ctr" w="0">
+                      <a:noFill/>
+                    </a:lnT>
+                    <a:lnB cap="flat" cmpd="sng" algn="ctr" w="9525">
+                      <a:solidFill>
+                        <a:srgbClr val="999999"/>
+                      </a:solidFill>
+                      <a:prstDash val="solid"/>
+                    </a:lnB>
+                    <a:solidFill>
+                      <a:srgbClr val="F2F2F2"/>
+                    </a:solidFill>
+                  </a:tcPr>
+                </a:tc>
+              </a:tr>
+              <a:tr h="387000">
+                <a:tc>
+                  <a:txBody>
+                    <a:bodyPr wrap="square"/>
+                    <a:lstStyle/>
+                    <a:p>
+                      <a:pPr algn="ctr"/>
+                      <a:r>
+                        <a:rPr sz="1100" b="1">
+                          <a:solidFill>
+                            <a:srgbClr val="1A1A1A"/>
+                          </a:solidFill>
+                          <a:latin typeface="Arial"/>
+                          <a:ea typeface="Arial"/>
+                          <a:cs typeface="Arial"/>
+                        </a:rPr>
+                        <a:t>結果3</a:t>
+                      </a:r>
+                    </a:p>
+                  </a:txBody>
+                  <a:tcPr marL="91440" marR="91440" marT="36576" marB="36576">
+                    <a:lnL cap="flat" cmpd="sng" algn="ctr" w="0">
+                      <a:noFill/>
+                    </a:lnL>
+                    <a:lnR cap="flat" cmpd="sng" algn="ctr" w="0">
+                      <a:noFill/>
+                    </a:lnR>
+                    <a:lnT cap="flat" cmpd="sng" algn="ctr" w="0">
+                      <a:noFill/>
+                    </a:lnT>
+                    <a:lnB cap="flat" cmpd="sng" algn="ctr" w="9525">
+                      <a:solidFill>
+                        <a:srgbClr val="999999"/>
+                      </a:solidFill>
+                      <a:prstDash val="solid"/>
+                    </a:lnB>
+                    <a:solidFill>
+                      <a:srgbClr val="FFFFFF"/>
+                    </a:solidFill>
+                  </a:tcPr>
+                </a:tc>
+                <a:tc>
+                  <a:txBody>
+                    <a:bodyPr wrap="square"/>
+                    <a:lstStyle/>
+                    <a:p>
+                      <a:pPr algn="l"/>
+                      <a:r>
+                        <a:rPr sz="1050" b="0">
+                          <a:solidFill>
+                            <a:srgbClr val="1A1A1A"/>
+                          </a:solidFill>
+                          <a:latin typeface="Arial"/>
+                          <a:ea typeface="Arial"/>
+                          <a:cs typeface="Arial"/>
+                        </a:rPr>
+                        <a:t>個人内変動幅（4時点の最大−最小）</a:t>
+                      </a:r>
+                    </a:p>
+                  </a:txBody>
+                  <a:tcPr marL="91440" marR="91440" marT="36576" marB="36576">
+                    <a:lnL cap="flat" cmpd="sng" algn="ctr" w="0">
+                      <a:noFill/>
+                    </a:lnL>
+                    <a:lnR cap="flat" cmpd="sng" algn="ctr" w="0">
+                      <a:noFill/>
+                    </a:lnR>
+                    <a:lnT cap="flat" cmpd="sng" algn="ctr" w="0">
+                      <a:noFill/>
+                    </a:lnT>
+                    <a:lnB cap="flat" cmpd="sng" algn="ctr" w="9525">
+                      <a:solidFill>
+                        <a:srgbClr val="999999"/>
+                      </a:solidFill>
+                      <a:prstDash val="solid"/>
+                    </a:lnB>
+                    <a:solidFill>
+                      <a:srgbClr val="FFFFFF"/>
+                    </a:solidFill>
+                  </a:tcPr>
+                </a:tc>
+                <a:tc>
+                  <a:txBody>
+                    <a:bodyPr wrap="square"/>
+                    <a:lstStyle/>
+                    <a:p>
+                      <a:pPr algn="l"/>
+                      <a:r>
+                        <a:rPr sz="1050" b="0">
+                          <a:solidFill>
+                            <a:srgbClr val="1A1A1A"/>
+                          </a:solidFill>
+                          <a:latin typeface="Arial"/>
+                          <a:ea typeface="Arial"/>
+                          <a:cs typeface="Arial"/>
+                        </a:rPr>
+                        <a:t>Mann-Whitney検定</a:t>
+                      </a:r>
+                    </a:p>
+                  </a:txBody>
+                  <a:tcPr marL="91440" marR="91440" marT="36576" marB="36576">
+                    <a:lnL cap="flat" cmpd="sng" algn="ctr" w="0">
+                      <a:noFill/>
+                    </a:lnL>
+                    <a:lnR cap="flat" cmpd="sng" algn="ctr" w="0">
+                      <a:noFill/>
+                    </a:lnR>
+                    <a:lnT cap="flat" cmpd="sng" algn="ctr" w="0">
+                      <a:noFill/>
+                    </a:lnT>
+                    <a:lnB cap="flat" cmpd="sng" algn="ctr" w="9525">
+                      <a:solidFill>
+                        <a:srgbClr val="999999"/>
+                      </a:solidFill>
+                      <a:prstDash val="solid"/>
+                    </a:lnB>
+                    <a:solidFill>
+                      <a:srgbClr val="FFFFFF"/>
+                    </a:solidFill>
+                  </a:tcPr>
+                </a:tc>
+                <a:tc>
+                  <a:txBody>
+                    <a:bodyPr wrap="square"/>
+                    <a:lstStyle/>
+                    <a:p>
+                      <a:pPr algn="ctr"/>
+                      <a:r>
+                        <a:rPr sz="1100" b="1">
+                          <a:solidFill>
+                            <a:srgbClr val="1A1A1A"/>
+                          </a:solidFill>
+                          <a:latin typeface="Arial"/>
+                          <a:ea typeface="Arial"/>
+                          <a:cs typeface="Arial"/>
+                        </a:rPr>
+                        <a:t>p = 0.034</a:t>
+                      </a:r>
+                    </a:p>
+                  </a:txBody>
+                  <a:tcPr marL="91440" marR="91440" marT="36576" marB="36576">
+                    <a:lnL cap="flat" cmpd="sng" algn="ctr" w="0">
+                      <a:noFill/>
+                    </a:lnL>
+                    <a:lnR cap="flat" cmpd="sng" algn="ctr" w="0">
+                      <a:noFill/>
+                    </a:lnR>
+                    <a:lnT cap="flat" cmpd="sng" algn="ctr" w="0">
+                      <a:noFill/>
+                    </a:lnT>
+                    <a:lnB cap="flat" cmpd="sng" algn="ctr" w="9525">
+                      <a:solidFill>
+                        <a:srgbClr val="999999"/>
+                      </a:solidFill>
+                      <a:prstDash val="solid"/>
+                    </a:lnB>
+                    <a:solidFill>
+                      <a:srgbClr val="FFFFFF"/>
+                    </a:solidFill>
+                  </a:tcPr>
+                </a:tc>
+                <a:tc>
+                  <a:txBody>
+                    <a:bodyPr wrap="square"/>
+                    <a:lstStyle/>
+                    <a:p>
+                      <a:pPr algn="ctr"/>
+                      <a:r>
+                        <a:rPr sz="1050" b="1">
+                          <a:solidFill>
+                            <a:srgbClr val="7F6000"/>
+                          </a:solidFill>
+                          <a:latin typeface="Arial"/>
+                          <a:ea typeface="Arial"/>
+                          <a:cs typeface="Arial"/>
+                        </a:rPr>
+                        <a:t>有意差あり（探索的・未補正）</a:t>
+                      </a:r>
+                    </a:p>
+                  </a:txBody>
+                  <a:tcPr marL="91440" marR="91440" marT="36576" marB="36576">
+                    <a:lnL cap="flat" cmpd="sng" algn="ctr" w="0">
+                      <a:noFill/>
+                    </a:lnL>
+                    <a:lnR cap="flat" cmpd="sng" algn="ctr" w="0">
+                      <a:noFill/>
+                    </a:lnR>
+                    <a:lnT cap="flat" cmpd="sng" algn="ctr" w="0">
+                      <a:noFill/>
+                    </a:lnT>
+                    <a:lnB cap="flat" cmpd="sng" algn="ctr" w="9525">
+                      <a:solidFill>
+                        <a:srgbClr val="999999"/>
+                      </a:solidFill>
+                      <a:prstDash val="solid"/>
+                    </a:lnB>
+                    <a:solidFill>
+                      <a:srgbClr val="FFF2CC"/>
+                    </a:solidFill>
+                  </a:tcPr>
+                </a:tc>
+              </a:tr>
+              <a:tr h="387000">
+                <a:tc>
+                  <a:txBody>
+                    <a:bodyPr wrap="square"/>
+                    <a:lstStyle/>
+                    <a:p>
+                      <a:pPr algn="ctr"/>
+                      <a:r>
+                        <a:rPr sz="1100" b="1">
+                          <a:solidFill>
+                            <a:srgbClr val="1A1A1A"/>
+                          </a:solidFill>
+                          <a:latin typeface="Arial"/>
+                          <a:ea typeface="Arial"/>
+                          <a:cs typeface="Arial"/>
+                        </a:rPr>
+                        <a:t>結果3</a:t>
+                      </a:r>
+                    </a:p>
+                  </a:txBody>
+                  <a:tcPr marL="91440" marR="91440" marT="36576" marB="36576">
+                    <a:lnL cap="flat" cmpd="sng" algn="ctr" w="0">
+                      <a:noFill/>
+                    </a:lnL>
+                    <a:lnR cap="flat" cmpd="sng" algn="ctr" w="0">
+                      <a:noFill/>
+                    </a:lnR>
+                    <a:lnT cap="flat" cmpd="sng" algn="ctr" w="0">
+                      <a:noFill/>
+                    </a:lnT>
+                    <a:lnB cap="flat" cmpd="sng" algn="ctr" w="9525">
+                      <a:solidFill>
+                        <a:srgbClr val="999999"/>
+                      </a:solidFill>
+                      <a:prstDash val="solid"/>
+                    </a:lnB>
+                    <a:solidFill>
+                      <a:srgbClr val="FFFFFF"/>
+                    </a:solidFill>
+                  </a:tcPr>
+                </a:tc>
+                <a:tc>
+                  <a:txBody>
+                    <a:bodyPr wrap="square"/>
+                    <a:lstStyle/>
+                    <a:p>
+                      <a:pPr algn="l"/>
+                      <a:r>
+                        <a:rPr sz="1050" b="0">
+                          <a:solidFill>
+                            <a:srgbClr val="1A1A1A"/>
+                          </a:solidFill>
+                          <a:latin typeface="Arial"/>
+                          <a:ea typeface="Arial"/>
+                          <a:cs typeface="Arial"/>
+                        </a:rPr>
+                        <a:t>Δ18MのSD（分散の均一性）</a:t>
+                      </a:r>
+                    </a:p>
+                  </a:txBody>
+                  <a:tcPr marL="91440" marR="91440" marT="36576" marB="36576">
+                    <a:lnL cap="flat" cmpd="sng" algn="ctr" w="0">
+                      <a:noFill/>
+                    </a:lnL>
+                    <a:lnR cap="flat" cmpd="sng" algn="ctr" w="0">
+                      <a:noFill/>
+                    </a:lnR>
+                    <a:lnT cap="flat" cmpd="sng" algn="ctr" w="0">
+                      <a:noFill/>
+                    </a:lnT>
+                    <a:lnB cap="flat" cmpd="sng" algn="ctr" w="9525">
+                      <a:solidFill>
+                        <a:srgbClr val="999999"/>
+                      </a:solidFill>
+                      <a:prstDash val="solid"/>
+                    </a:lnB>
+                    <a:solidFill>
+                      <a:srgbClr val="FFFFFF"/>
+                    </a:solidFill>
+                  </a:tcPr>
+                </a:tc>
+                <a:tc>
+                  <a:txBody>
+                    <a:bodyPr wrap="square"/>
+                    <a:lstStyle/>
+                    <a:p>
+                      <a:pPr algn="l"/>
+                      <a:r>
+                        <a:rPr sz="1050" b="0">
+                          <a:solidFill>
+                            <a:srgbClr val="1A1A1A"/>
+                          </a:solidFill>
+                          <a:latin typeface="Arial"/>
+                          <a:ea typeface="Arial"/>
+                          <a:cs typeface="Arial"/>
+                        </a:rPr>
+                        <a:t>Levene検定</a:t>
+                      </a:r>
+                    </a:p>
+                  </a:txBody>
+                  <a:tcPr marL="91440" marR="91440" marT="36576" marB="36576">
+                    <a:lnL cap="flat" cmpd="sng" algn="ctr" w="0">
+                      <a:noFill/>
+                    </a:lnL>
+                    <a:lnR cap="flat" cmpd="sng" algn="ctr" w="0">
+                      <a:noFill/>
+                    </a:lnR>
+                    <a:lnT cap="flat" cmpd="sng" algn="ctr" w="0">
+                      <a:noFill/>
+                    </a:lnT>
+                    <a:lnB cap="flat" cmpd="sng" algn="ctr" w="9525">
+                      <a:solidFill>
+                        <a:srgbClr val="999999"/>
+                      </a:solidFill>
+                      <a:prstDash val="solid"/>
+                    </a:lnB>
+                    <a:solidFill>
+                      <a:srgbClr val="FFFFFF"/>
+                    </a:solidFill>
+                  </a:tcPr>
+                </a:tc>
+                <a:tc>
+                  <a:txBody>
+                    <a:bodyPr wrap="square"/>
+                    <a:lstStyle/>
+                    <a:p>
+                      <a:pPr algn="ctr"/>
+                      <a:r>
+                        <a:rPr sz="1100" b="1">
+                          <a:solidFill>
+                            <a:srgbClr val="1A1A1A"/>
+                          </a:solidFill>
+                          <a:latin typeface="Arial"/>
+                          <a:ea typeface="Arial"/>
+                          <a:cs typeface="Arial"/>
+                        </a:rPr>
+                        <a:t>p = 0.146</a:t>
+                      </a:r>
+                    </a:p>
+                  </a:txBody>
+                  <a:tcPr marL="91440" marR="91440" marT="36576" marB="36576">
+                    <a:lnL cap="flat" cmpd="sng" algn="ctr" w="0">
+                      <a:noFill/>
+                    </a:lnL>
+                    <a:lnR cap="flat" cmpd="sng" algn="ctr" w="0">
+                      <a:noFill/>
+                    </a:lnR>
+                    <a:lnT cap="flat" cmpd="sng" algn="ctr" w="0">
+                      <a:noFill/>
+                    </a:lnT>
+                    <a:lnB cap="flat" cmpd="sng" algn="ctr" w="9525">
+                      <a:solidFill>
+                        <a:srgbClr val="999999"/>
+                      </a:solidFill>
+                      <a:prstDash val="solid"/>
+                    </a:lnB>
+                    <a:solidFill>
+                      <a:srgbClr val="FFFFFF"/>
+                    </a:solidFill>
+                  </a:tcPr>
+                </a:tc>
+                <a:tc>
+                  <a:txBody>
+                    <a:bodyPr wrap="square"/>
+                    <a:lstStyle/>
+                    <a:p>
+                      <a:pPr algn="ctr"/>
+                      <a:r>
+                        <a:rPr sz="1050" b="1">
+                          <a:solidFill>
+                            <a:srgbClr val="404040"/>
+                          </a:solidFill>
+                          <a:latin typeface="Arial"/>
+                          <a:ea typeface="Arial"/>
+                          <a:cs typeface="Arial"/>
+                        </a:rPr>
+                        <a:t>有意差なし</a:t>
+                      </a:r>
+                    </a:p>
+                  </a:txBody>
+                  <a:tcPr marL="91440" marR="91440" marT="36576" marB="36576">
+                    <a:lnL cap="flat" cmpd="sng" algn="ctr" w="0">
+                      <a:noFill/>
+                    </a:lnL>
+                    <a:lnR cap="flat" cmpd="sng" algn="ctr" w="0">
+                      <a:noFill/>
+                    </a:lnR>
+                    <a:lnT cap="flat" cmpd="sng" algn="ctr" w="0">
+                      <a:noFill/>
+                    </a:lnT>
+                    <a:lnB cap="flat" cmpd="sng" algn="ctr" w="9525">
+                      <a:solidFill>
+                        <a:srgbClr val="999999"/>
+                      </a:solidFill>
+                      <a:prstDash val="solid"/>
+                    </a:lnB>
+                    <a:solidFill>
+                      <a:srgbClr val="F2F2F2"/>
+                    </a:solidFill>
+                  </a:tcPr>
+                </a:tc>
+              </a:tr>
+              <a:tr h="387000">
+                <a:tc>
+                  <a:txBody>
+                    <a:bodyPr wrap="square"/>
+                    <a:lstStyle/>
+                    <a:p>
+                      <a:pPr algn="ctr"/>
+                      <a:r>
+                        <a:rPr sz="1100" b="1">
+                          <a:solidFill>
+                            <a:srgbClr val="1A1A1A"/>
+                          </a:solidFill>
+                          <a:latin typeface="Arial"/>
+                          <a:ea typeface="Arial"/>
+                          <a:cs typeface="Arial"/>
+                        </a:rPr>
+                        <a:t>結果4</a:t>
+                      </a:r>
+                    </a:p>
+                  </a:txBody>
+                  <a:tcPr marL="91440" marR="91440" marT="36576" marB="36576">
+                    <a:lnL cap="flat" cmpd="sng" algn="ctr" w="0">
+                      <a:noFill/>
+                    </a:lnL>
+                    <a:lnR cap="flat" cmpd="sng" algn="ctr" w="0">
+                      <a:noFill/>
+                    </a:lnR>
+                    <a:lnT cap="flat" cmpd="sng" algn="ctr" w="0">
+                      <a:noFill/>
+                    </a:lnT>
+                    <a:lnB cap="flat" cmpd="sng" algn="ctr" w="9525">
+                      <a:solidFill>
+                        <a:srgbClr val="999999"/>
+                      </a:solidFill>
+                      <a:prstDash val="solid"/>
+                    </a:lnB>
+                    <a:solidFill>
+                      <a:srgbClr val="FFFFFF"/>
+                    </a:solidFill>
+                  </a:tcPr>
+                </a:tc>
+                <a:tc>
+                  <a:txBody>
+                    <a:bodyPr wrap="square"/>
+                    <a:lstStyle/>
+                    <a:p>
+                      <a:pPr algn="l"/>
+                      <a:r>
+                        <a:rPr sz="1050" b="0">
+                          <a:solidFill>
+                            <a:srgbClr val="1A1A1A"/>
+                          </a:solidFill>
+                          <a:latin typeface="Arial"/>
+                          <a:ea typeface="Arial"/>
+                          <a:cs typeface="Arial"/>
+                        </a:rPr>
+                        <a:t>MMSE下位項目11項目（18か月時点のΔ）</a:t>
+                      </a:r>
+                    </a:p>
+                  </a:txBody>
+                  <a:tcPr marL="91440" marR="91440" marT="36576" marB="36576">
+                    <a:lnL cap="flat" cmpd="sng" algn="ctr" w="0">
+                      <a:noFill/>
+                    </a:lnL>
+                    <a:lnR cap="flat" cmpd="sng" algn="ctr" w="0">
+                      <a:noFill/>
+                    </a:lnR>
+                    <a:lnT cap="flat" cmpd="sng" algn="ctr" w="0">
+                      <a:noFill/>
+                    </a:lnT>
+                    <a:lnB cap="flat" cmpd="sng" algn="ctr" w="9525">
+                      <a:solidFill>
+                        <a:srgbClr val="999999"/>
+                      </a:solidFill>
+                      <a:prstDash val="solid"/>
+                    </a:lnB>
+                    <a:solidFill>
+                      <a:srgbClr val="FFFFFF"/>
+                    </a:solidFill>
+                  </a:tcPr>
+                </a:tc>
+                <a:tc>
+                  <a:txBody>
+                    <a:bodyPr wrap="square"/>
+                    <a:lstStyle/>
+                    <a:p>
+                      <a:pPr algn="l"/>
+                      <a:r>
+                        <a:rPr sz="1050" b="0">
+                          <a:solidFill>
+                            <a:srgbClr val="1A1A1A"/>
+                          </a:solidFill>
+                          <a:latin typeface="Arial"/>
+                          <a:ea typeface="Arial"/>
+                          <a:cs typeface="Arial"/>
+                        </a:rPr>
+                        <a:t>Mann-Whitney×11／BH法でFDR補正</a:t>
+                      </a:r>
+                    </a:p>
+                  </a:txBody>
+                  <a:tcPr marL="91440" marR="91440" marT="36576" marB="36576">
+                    <a:lnL cap="flat" cmpd="sng" algn="ctr" w="0">
+                      <a:noFill/>
+                    </a:lnL>
+                    <a:lnR cap="flat" cmpd="sng" algn="ctr" w="0">
+                      <a:noFill/>
+                    </a:lnR>
+                    <a:lnT cap="flat" cmpd="sng" algn="ctr" w="0">
+                      <a:noFill/>
+                    </a:lnT>
+                    <a:lnB cap="flat" cmpd="sng" algn="ctr" w="9525">
+                      <a:solidFill>
+                        <a:srgbClr val="999999"/>
+                      </a:solidFill>
+                      <a:prstDash val="solid"/>
+                    </a:lnB>
+                    <a:solidFill>
+                      <a:srgbClr val="FFFFFF"/>
+                    </a:solidFill>
+                  </a:tcPr>
+                </a:tc>
+                <a:tc>
+                  <a:txBody>
+                    <a:bodyPr wrap="square"/>
+                    <a:lstStyle/>
+                    <a:p>
+                      <a:pPr algn="ctr"/>
+                      <a:r>
+                        <a:rPr sz="1100" b="1">
+                          <a:solidFill>
+                            <a:srgbClr val="1A1A1A"/>
+                          </a:solidFill>
+                          <a:latin typeface="Arial"/>
+                          <a:ea typeface="Arial"/>
+                          <a:cs typeface="Arial"/>
+                        </a:rPr>
+                        <a:t>最小 p=0.157／最小 q=0.778</a:t>
+                      </a:r>
+                    </a:p>
+                  </a:txBody>
+                  <a:tcPr marL="91440" marR="91440" marT="36576" marB="36576">
+                    <a:lnL cap="flat" cmpd="sng" algn="ctr" w="0">
+                      <a:noFill/>
+                    </a:lnL>
+                    <a:lnR cap="flat" cmpd="sng" algn="ctr" w="0">
+                      <a:noFill/>
+                    </a:lnR>
+                    <a:lnT cap="flat" cmpd="sng" algn="ctr" w="0">
+                      <a:noFill/>
+                    </a:lnT>
+                    <a:lnB cap="flat" cmpd="sng" algn="ctr" w="9525">
+                      <a:solidFill>
+                        <a:srgbClr val="999999"/>
+                      </a:solidFill>
+                      <a:prstDash val="solid"/>
+                    </a:lnB>
+                    <a:solidFill>
+                      <a:srgbClr val="FFFFFF"/>
+                    </a:solidFill>
+                  </a:tcPr>
+                </a:tc>
+                <a:tc>
+                  <a:txBody>
+                    <a:bodyPr wrap="square"/>
+                    <a:lstStyle/>
+                    <a:p>
+                      <a:pPr algn="ctr"/>
+                      <a:r>
+                        <a:rPr sz="1050" b="1">
+                          <a:solidFill>
+                            <a:srgbClr val="404040"/>
+                          </a:solidFill>
+                          <a:latin typeface="Arial"/>
+                          <a:ea typeface="Arial"/>
+                          <a:cs typeface="Arial"/>
+                        </a:rPr>
+                        <a:t>全11項目 有意差なし</a:t>
+                      </a:r>
+                    </a:p>
+                  </a:txBody>
+                  <a:tcPr marL="91440" marR="91440" marT="36576" marB="36576">
+                    <a:lnL cap="flat" cmpd="sng" algn="ctr" w="0">
+                      <a:noFill/>
+                    </a:lnL>
+                    <a:lnR cap="flat" cmpd="sng" algn="ctr" w="0">
+                      <a:noFill/>
+                    </a:lnR>
+                    <a:lnT cap="flat" cmpd="sng" algn="ctr" w="0">
+                      <a:noFill/>
+                    </a:lnT>
+                    <a:lnB cap="flat" cmpd="sng" algn="ctr" w="9525">
+                      <a:solidFill>
+                        <a:srgbClr val="999999"/>
+                      </a:solidFill>
+                      <a:prstDash val="solid"/>
+                    </a:lnB>
+                    <a:solidFill>
+                      <a:srgbClr val="F2F2F2"/>
+                    </a:solidFill>
+                  </a:tcPr>
+                </a:tc>
+              </a:tr>
+              <a:tr h="387000">
+                <a:tc>
+                  <a:txBody>
+                    <a:bodyPr wrap="square"/>
+                    <a:lstStyle/>
+                    <a:p>
+                      <a:pPr algn="ctr"/>
+                      <a:r>
+                        <a:rPr sz="1100" b="1">
+                          <a:solidFill>
+                            <a:srgbClr val="1A1A1A"/>
+                          </a:solidFill>
+                          <a:latin typeface="Arial"/>
+                          <a:ea typeface="Arial"/>
+                          <a:cs typeface="Arial"/>
+                        </a:rPr>
+                        <a:t>結果4</a:t>
+                      </a:r>
+                    </a:p>
+                  </a:txBody>
+                  <a:tcPr marL="91440" marR="91440" marT="36576" marB="36576">
+                    <a:lnL cap="flat" cmpd="sng" algn="ctr" w="0">
+                      <a:noFill/>
+                    </a:lnL>
+                    <a:lnR cap="flat" cmpd="sng" algn="ctr" w="0">
+                      <a:noFill/>
+                    </a:lnR>
+                    <a:lnT cap="flat" cmpd="sng" algn="ctr" w="0">
+                      <a:noFill/>
+                    </a:lnT>
+                    <a:lnB cap="flat" cmpd="sng" algn="ctr" w="9525">
+                      <a:solidFill>
+                        <a:srgbClr val="999999"/>
+                      </a:solidFill>
+                      <a:prstDash val="solid"/>
+                    </a:lnB>
+                    <a:solidFill>
+                      <a:srgbClr val="FFFFFF"/>
+                    </a:solidFill>
+                  </a:tcPr>
+                </a:tc>
+                <a:tc>
+                  <a:txBody>
+                    <a:bodyPr wrap="square"/>
+                    <a:lstStyle/>
+                    <a:p>
+                      <a:pPr algn="l"/>
+                      <a:r>
+                        <a:rPr sz="1050" b="0">
+                          <a:solidFill>
+                            <a:srgbClr val="1A1A1A"/>
+                          </a:solidFill>
+                          <a:latin typeface="Arial"/>
+                          <a:ea typeface="Arial"/>
+                          <a:cs typeface="Arial"/>
+                        </a:rPr>
+                        <a:t>CDR 6領域（同上）</a:t>
+                      </a:r>
+                    </a:p>
+                  </a:txBody>
+                  <a:tcPr marL="91440" marR="91440" marT="36576" marB="36576">
+                    <a:lnL cap="flat" cmpd="sng" algn="ctr" w="0">
+                      <a:noFill/>
+                    </a:lnL>
+                    <a:lnR cap="flat" cmpd="sng" algn="ctr" w="0">
+                      <a:noFill/>
+                    </a:lnR>
+                    <a:lnT cap="flat" cmpd="sng" algn="ctr" w="0">
+                      <a:noFill/>
+                    </a:lnT>
+                    <a:lnB cap="flat" cmpd="sng" algn="ctr" w="9525">
+                      <a:solidFill>
+                        <a:srgbClr val="999999"/>
+                      </a:solidFill>
+                      <a:prstDash val="solid"/>
+                    </a:lnB>
+                    <a:solidFill>
+                      <a:srgbClr val="FFFFFF"/>
+                    </a:solidFill>
+                  </a:tcPr>
+                </a:tc>
+                <a:tc>
+                  <a:txBody>
+                    <a:bodyPr wrap="square"/>
+                    <a:lstStyle/>
+                    <a:p>
+                      <a:pPr algn="l"/>
+                      <a:r>
+                        <a:rPr sz="1050" b="0">
+                          <a:solidFill>
+                            <a:srgbClr val="1A1A1A"/>
+                          </a:solidFill>
+                          <a:latin typeface="Arial"/>
+                          <a:ea typeface="Arial"/>
+                          <a:cs typeface="Arial"/>
+                        </a:rPr>
+                        <a:t>同上</a:t>
+                      </a:r>
+                    </a:p>
+                  </a:txBody>
+                  <a:tcPr marL="91440" marR="91440" marT="36576" marB="36576">
+                    <a:lnL cap="flat" cmpd="sng" algn="ctr" w="0">
+                      <a:noFill/>
+                    </a:lnL>
+                    <a:lnR cap="flat" cmpd="sng" algn="ctr" w="0">
+                      <a:noFill/>
+                    </a:lnR>
+                    <a:lnT cap="flat" cmpd="sng" algn="ctr" w="0">
+                      <a:noFill/>
+                    </a:lnT>
+                    <a:lnB cap="flat" cmpd="sng" algn="ctr" w="9525">
+                      <a:solidFill>
+                        <a:srgbClr val="999999"/>
+                      </a:solidFill>
+                      <a:prstDash val="solid"/>
+                    </a:lnB>
+                    <a:solidFill>
+                      <a:srgbClr val="FFFFFF"/>
+                    </a:solidFill>
+                  </a:tcPr>
+                </a:tc>
+                <a:tc>
+                  <a:txBody>
+                    <a:bodyPr wrap="square"/>
+                    <a:lstStyle/>
+                    <a:p>
+                      <a:pPr algn="ctr"/>
+                      <a:r>
+                        <a:rPr sz="1100" b="1">
+                          <a:solidFill>
+                            <a:srgbClr val="1A1A1A"/>
+                          </a:solidFill>
+                          <a:latin typeface="Arial"/>
+                          <a:ea typeface="Arial"/>
+                          <a:cs typeface="Arial"/>
+                        </a:rPr>
+                        <a:t>最小 p=0.598</a:t>
+                      </a:r>
+                    </a:p>
+                  </a:txBody>
+                  <a:tcPr marL="91440" marR="91440" marT="36576" marB="36576">
+                    <a:lnL cap="flat" cmpd="sng" algn="ctr" w="0">
+                      <a:noFill/>
+                    </a:lnL>
+                    <a:lnR cap="flat" cmpd="sng" algn="ctr" w="0">
+                      <a:noFill/>
+                    </a:lnR>
+                    <a:lnT cap="flat" cmpd="sng" algn="ctr" w="0">
+                      <a:noFill/>
+                    </a:lnT>
+                    <a:lnB cap="flat" cmpd="sng" algn="ctr" w="9525">
+                      <a:solidFill>
+                        <a:srgbClr val="999999"/>
+                      </a:solidFill>
+                      <a:prstDash val="solid"/>
+                    </a:lnB>
+                    <a:solidFill>
+                      <a:srgbClr val="FFFFFF"/>
+                    </a:solidFill>
+                  </a:tcPr>
+                </a:tc>
+                <a:tc>
+                  <a:txBody>
+                    <a:bodyPr wrap="square"/>
+                    <a:lstStyle/>
+                    <a:p>
+                      <a:pPr algn="ctr"/>
+                      <a:r>
+                        <a:rPr sz="1050" b="1">
+                          <a:solidFill>
+                            <a:srgbClr val="404040"/>
+                          </a:solidFill>
+                          <a:latin typeface="Arial"/>
+                          <a:ea typeface="Arial"/>
+                          <a:cs typeface="Arial"/>
+                        </a:rPr>
+                        <a:t>全6領域 有意差なし</a:t>
+                      </a:r>
+                    </a:p>
+                  </a:txBody>
+                  <a:tcPr marL="91440" marR="91440" marT="36576" marB="36576">
+                    <a:lnL cap="flat" cmpd="sng" algn="ctr" w="0">
+                      <a:noFill/>
+                    </a:lnL>
+                    <a:lnR cap="flat" cmpd="sng" algn="ctr" w="0">
+                      <a:noFill/>
+                    </a:lnR>
+                    <a:lnT cap="flat" cmpd="sng" algn="ctr" w="0">
+                      <a:noFill/>
+                    </a:lnT>
+                    <a:lnB cap="flat" cmpd="sng" algn="ctr" w="9525">
+                      <a:solidFill>
+                        <a:srgbClr val="999999"/>
+                      </a:solidFill>
+                      <a:prstDash val="solid"/>
+                    </a:lnB>
+                    <a:solidFill>
+                      <a:srgbClr val="F2F2F2"/>
+                    </a:solidFill>
+                  </a:tcPr>
+                </a:tc>
+              </a:tr>
+              <a:tr h="387000">
+                <a:tc>
+                  <a:txBody>
+                    <a:bodyPr wrap="square"/>
+                    <a:lstStyle/>
+                    <a:p>
+                      <a:pPr algn="ctr"/>
+                      <a:r>
+                        <a:rPr sz="1100" b="1">
+                          <a:solidFill>
+                            <a:srgbClr val="1A1A1A"/>
+                          </a:solidFill>
+                          <a:latin typeface="Arial"/>
+                          <a:ea typeface="Arial"/>
+                          <a:cs typeface="Arial"/>
+                        </a:rPr>
+                        <a:t>結果5</a:t>
+                      </a:r>
+                    </a:p>
+                  </a:txBody>
+                  <a:tcPr marL="91440" marR="91440" marT="36576" marB="36576">
+                    <a:lnL cap="flat" cmpd="sng" algn="ctr" w="0">
+                      <a:noFill/>
+                    </a:lnL>
+                    <a:lnR cap="flat" cmpd="sng" algn="ctr" w="0">
+                      <a:noFill/>
+                    </a:lnR>
+                    <a:lnT cap="flat" cmpd="sng" algn="ctr" w="0">
+                      <a:noFill/>
+                    </a:lnT>
+                    <a:lnB cap="flat" cmpd="sng" algn="ctr" w="9525">
+                      <a:solidFill>
+                        <a:srgbClr val="999999"/>
+                      </a:solidFill>
+                      <a:prstDash val="solid"/>
+                    </a:lnB>
+                    <a:solidFill>
+                      <a:srgbClr val="FFFFFF"/>
+                    </a:solidFill>
+                  </a:tcPr>
+                </a:tc>
+                <a:tc>
+                  <a:txBody>
+                    <a:bodyPr wrap="square"/>
+                    <a:lstStyle/>
+                    <a:p>
+                      <a:pPr algn="l"/>
+                      <a:r>
+                        <a:rPr sz="1050" b="0">
+                          <a:solidFill>
+                            <a:srgbClr val="1A1A1A"/>
+                          </a:solidFill>
+                          <a:latin typeface="Arial"/>
+                          <a:ea typeface="Arial"/>
+                          <a:cs typeface="Arial"/>
+                        </a:rPr>
+                        <a:t>訴えあり vs なし　18か月時点のMMSE実測値</a:t>
+                      </a:r>
+                    </a:p>
+                  </a:txBody>
+                  <a:tcPr marL="91440" marR="91440" marT="36576" marB="36576">
+                    <a:lnL cap="flat" cmpd="sng" algn="ctr" w="0">
+                      <a:noFill/>
+                    </a:lnL>
+                    <a:lnR cap="flat" cmpd="sng" algn="ctr" w="0">
+                      <a:noFill/>
+                    </a:lnR>
+                    <a:lnT cap="flat" cmpd="sng" algn="ctr" w="0">
+                      <a:noFill/>
+                    </a:lnT>
+                    <a:lnB cap="flat" cmpd="sng" algn="ctr" w="9525">
+                      <a:solidFill>
+                        <a:srgbClr val="999999"/>
+                      </a:solidFill>
+                      <a:prstDash val="solid"/>
+                    </a:lnB>
+                    <a:solidFill>
+                      <a:srgbClr val="FFFFFF"/>
+                    </a:solidFill>
+                  </a:tcPr>
+                </a:tc>
+                <a:tc>
+                  <a:txBody>
+                    <a:bodyPr wrap="square"/>
+                    <a:lstStyle/>
+                    <a:p>
+                      <a:pPr algn="l"/>
+                      <a:r>
+                        <a:rPr sz="1050" b="0">
+                          <a:solidFill>
+                            <a:srgbClr val="1A1A1A"/>
+                          </a:solidFill>
+                          <a:latin typeface="Arial"/>
+                          <a:ea typeface="Arial"/>
+                          <a:cs typeface="Arial"/>
+                        </a:rPr>
+                        <a:t>Welchのt検定</a:t>
+                      </a:r>
+                    </a:p>
+                  </a:txBody>
+                  <a:tcPr marL="91440" marR="91440" marT="36576" marB="36576">
+                    <a:lnL cap="flat" cmpd="sng" algn="ctr" w="0">
+                      <a:noFill/>
+                    </a:lnL>
+                    <a:lnR cap="flat" cmpd="sng" algn="ctr" w="0">
+                      <a:noFill/>
+                    </a:lnR>
+                    <a:lnT cap="flat" cmpd="sng" algn="ctr" w="0">
+                      <a:noFill/>
+                    </a:lnT>
+                    <a:lnB cap="flat" cmpd="sng" algn="ctr" w="9525">
+                      <a:solidFill>
+                        <a:srgbClr val="999999"/>
+                      </a:solidFill>
+                      <a:prstDash val="solid"/>
+                    </a:lnB>
+                    <a:solidFill>
+                      <a:srgbClr val="FFFFFF"/>
+                    </a:solidFill>
+                  </a:tcPr>
+                </a:tc>
+                <a:tc>
+                  <a:txBody>
+                    <a:bodyPr wrap="square"/>
+                    <a:lstStyle/>
+                    <a:p>
+                      <a:pPr algn="ctr"/>
+                      <a:r>
+                        <a:rPr sz="1100" b="1">
+                          <a:solidFill>
+                            <a:srgbClr val="1A1A1A"/>
+                          </a:solidFill>
+                          <a:latin typeface="Arial"/>
+                          <a:ea typeface="Arial"/>
+                          <a:cs typeface="Arial"/>
+                        </a:rPr>
+                        <a:t>p = 0.804</a:t>
+                      </a:r>
+                    </a:p>
+                  </a:txBody>
+                  <a:tcPr marL="91440" marR="91440" marT="36576" marB="36576">
+                    <a:lnL cap="flat" cmpd="sng" algn="ctr" w="0">
+                      <a:noFill/>
+                    </a:lnL>
+                    <a:lnR cap="flat" cmpd="sng" algn="ctr" w="0">
+                      <a:noFill/>
+                    </a:lnR>
+                    <a:lnT cap="flat" cmpd="sng" algn="ctr" w="0">
+                      <a:noFill/>
+                    </a:lnT>
+                    <a:lnB cap="flat" cmpd="sng" algn="ctr" w="9525">
+                      <a:solidFill>
+                        <a:srgbClr val="999999"/>
+                      </a:solidFill>
+                      <a:prstDash val="solid"/>
+                    </a:lnB>
+                    <a:solidFill>
+                      <a:srgbClr val="FFFFFF"/>
+                    </a:solidFill>
+                  </a:tcPr>
+                </a:tc>
+                <a:tc>
+                  <a:txBody>
+                    <a:bodyPr wrap="square"/>
+                    <a:lstStyle/>
+                    <a:p>
+                      <a:pPr algn="ctr"/>
+                      <a:r>
+                        <a:rPr sz="1050" b="1">
+                          <a:solidFill>
+                            <a:srgbClr val="404040"/>
+                          </a:solidFill>
+                          <a:latin typeface="Arial"/>
+                          <a:ea typeface="Arial"/>
+                          <a:cs typeface="Arial"/>
+                        </a:rPr>
+                        <a:t>有意差なし</a:t>
+                      </a:r>
+                    </a:p>
+                  </a:txBody>
+                  <a:tcPr marL="91440" marR="91440" marT="36576" marB="36576">
+                    <a:lnL cap="flat" cmpd="sng" algn="ctr" w="0">
+                      <a:noFill/>
+                    </a:lnL>
+                    <a:lnR cap="flat" cmpd="sng" algn="ctr" w="0">
+                      <a:noFill/>
+                    </a:lnR>
+                    <a:lnT cap="flat" cmpd="sng" algn="ctr" w="0">
+                      <a:noFill/>
+                    </a:lnT>
+                    <a:lnB cap="flat" cmpd="sng" algn="ctr" w="9525">
+                      <a:solidFill>
+                        <a:srgbClr val="999999"/>
+                      </a:solidFill>
+                      <a:prstDash val="solid"/>
+                    </a:lnB>
+                    <a:solidFill>
+                      <a:srgbClr val="F2F2F2"/>
+                    </a:solidFill>
+                  </a:tcPr>
+                </a:tc>
+              </a:tr>
+              <a:tr h="387000">
+                <a:tc>
+                  <a:txBody>
+                    <a:bodyPr wrap="square"/>
+                    <a:lstStyle/>
+                    <a:p>
+                      <a:pPr algn="ctr"/>
+                      <a:r>
+                        <a:rPr sz="1100" b="1">
+                          <a:solidFill>
+                            <a:srgbClr val="1A1A1A"/>
+                          </a:solidFill>
+                          <a:latin typeface="Arial"/>
+                          <a:ea typeface="Arial"/>
+                          <a:cs typeface="Arial"/>
+                        </a:rPr>
+                        <a:t>結果5</a:t>
+                      </a:r>
+                    </a:p>
+                  </a:txBody>
+                  <a:tcPr marL="91440" marR="91440" marT="36576" marB="36576">
+                    <a:lnL cap="flat" cmpd="sng" algn="ctr" w="0">
+                      <a:noFill/>
+                    </a:lnL>
+                    <a:lnR cap="flat" cmpd="sng" algn="ctr" w="0">
+                      <a:noFill/>
+                    </a:lnR>
+                    <a:lnT cap="flat" cmpd="sng" algn="ctr" w="0">
+                      <a:noFill/>
+                    </a:lnT>
+                    <a:lnB cap="flat" cmpd="sng" algn="ctr" w="9525">
+                      <a:solidFill>
+                        <a:srgbClr val="999999"/>
+                      </a:solidFill>
+                      <a:prstDash val="solid"/>
+                    </a:lnB>
+                    <a:solidFill>
+                      <a:srgbClr val="FFFFFF"/>
+                    </a:solidFill>
+                  </a:tcPr>
+                </a:tc>
+                <a:tc>
+                  <a:txBody>
+                    <a:bodyPr wrap="square"/>
+                    <a:lstStyle/>
+                    <a:p>
+                      <a:pPr algn="l"/>
+                      <a:r>
+                        <a:rPr sz="1050" b="0">
+                          <a:solidFill>
+                            <a:srgbClr val="1A1A1A"/>
+                          </a:solidFill>
+                          <a:latin typeface="Arial"/>
+                          <a:ea typeface="Arial"/>
+                          <a:cs typeface="Arial"/>
+                        </a:rPr>
+                        <a:t>同上</a:t>
+                      </a:r>
+                    </a:p>
+                  </a:txBody>
+                  <a:tcPr marL="91440" marR="91440" marT="36576" marB="36576">
+                    <a:lnL cap="flat" cmpd="sng" algn="ctr" w="0">
+                      <a:noFill/>
+                    </a:lnL>
+                    <a:lnR cap="flat" cmpd="sng" algn="ctr" w="0">
+                      <a:noFill/>
+                    </a:lnR>
+                    <a:lnT cap="flat" cmpd="sng" algn="ctr" w="0">
+                      <a:noFill/>
+                    </a:lnT>
+                    <a:lnB cap="flat" cmpd="sng" algn="ctr" w="9525">
+                      <a:solidFill>
+                        <a:srgbClr val="999999"/>
+                      </a:solidFill>
+                      <a:prstDash val="solid"/>
+                    </a:lnB>
+                    <a:solidFill>
+                      <a:srgbClr val="FFFFFF"/>
+                    </a:solidFill>
+                  </a:tcPr>
+                </a:tc>
+                <a:tc>
+                  <a:txBody>
+                    <a:bodyPr wrap="square"/>
+                    <a:lstStyle/>
+                    <a:p>
+                      <a:pPr algn="l"/>
+                      <a:r>
+                        <a:rPr sz="1050" b="0">
+                          <a:solidFill>
+                            <a:srgbClr val="1A1A1A"/>
+                          </a:solidFill>
+                          <a:latin typeface="Arial"/>
+                          <a:ea typeface="Arial"/>
+                          <a:cs typeface="Arial"/>
+                        </a:rPr>
+                        <a:t>Mann-Whitney検定</a:t>
+                      </a:r>
+                    </a:p>
+                  </a:txBody>
+                  <a:tcPr marL="91440" marR="91440" marT="36576" marB="36576">
+                    <a:lnL cap="flat" cmpd="sng" algn="ctr" w="0">
+                      <a:noFill/>
+                    </a:lnL>
+                    <a:lnR cap="flat" cmpd="sng" algn="ctr" w="0">
+                      <a:noFill/>
+                    </a:lnR>
+                    <a:lnT cap="flat" cmpd="sng" algn="ctr" w="0">
+                      <a:noFill/>
+                    </a:lnT>
+                    <a:lnB cap="flat" cmpd="sng" algn="ctr" w="9525">
+                      <a:solidFill>
+                        <a:srgbClr val="999999"/>
+                      </a:solidFill>
+                      <a:prstDash val="solid"/>
+                    </a:lnB>
+                    <a:solidFill>
+                      <a:srgbClr val="FFFFFF"/>
+                    </a:solidFill>
+                  </a:tcPr>
+                </a:tc>
+                <a:tc>
+                  <a:txBody>
+                    <a:bodyPr wrap="square"/>
+                    <a:lstStyle/>
+                    <a:p>
+                      <a:pPr algn="ctr"/>
+                      <a:r>
+                        <a:rPr sz="1100" b="1">
+                          <a:solidFill>
+                            <a:srgbClr val="1A1A1A"/>
+                          </a:solidFill>
+                          <a:latin typeface="Arial"/>
+                          <a:ea typeface="Arial"/>
+                          <a:cs typeface="Arial"/>
+                        </a:rPr>
+                        <a:t>p = 0.617</a:t>
+                      </a:r>
+                    </a:p>
+                  </a:txBody>
+                  <a:tcPr marL="91440" marR="91440" marT="36576" marB="36576">
+                    <a:lnL cap="flat" cmpd="sng" algn="ctr" w="0">
+                      <a:noFill/>
+                    </a:lnL>
+                    <a:lnR cap="flat" cmpd="sng" algn="ctr" w="0">
+                      <a:noFill/>
+                    </a:lnR>
+                    <a:lnT cap="flat" cmpd="sng" algn="ctr" w="0">
+                      <a:noFill/>
+                    </a:lnT>
+                    <a:lnB cap="flat" cmpd="sng" algn="ctr" w="9525">
+                      <a:solidFill>
+                        <a:srgbClr val="999999"/>
+                      </a:solidFill>
+                      <a:prstDash val="solid"/>
+                    </a:lnB>
+                    <a:solidFill>
+                      <a:srgbClr val="FFFFFF"/>
+                    </a:solidFill>
+                  </a:tcPr>
+                </a:tc>
+                <a:tc>
+                  <a:txBody>
+                    <a:bodyPr wrap="square"/>
+                    <a:lstStyle/>
+                    <a:p>
+                      <a:pPr algn="ctr"/>
+                      <a:r>
+                        <a:rPr sz="1050" b="1">
+                          <a:solidFill>
+                            <a:srgbClr val="404040"/>
+                          </a:solidFill>
+                          <a:latin typeface="Arial"/>
+                          <a:ea typeface="Arial"/>
+                          <a:cs typeface="Arial"/>
+                        </a:rPr>
+                        <a:t>有意差なし</a:t>
+                      </a:r>
+                    </a:p>
+                  </a:txBody>
+                  <a:tcPr marL="91440" marR="91440" marT="36576" marB="36576">
+                    <a:lnL cap="flat" cmpd="sng" algn="ctr" w="0">
+                      <a:noFill/>
+                    </a:lnL>
+                    <a:lnR cap="flat" cmpd="sng" algn="ctr" w="0">
+                      <a:noFill/>
+                    </a:lnR>
+                    <a:lnT cap="flat" cmpd="sng" algn="ctr" w="0">
+                      <a:noFill/>
+                    </a:lnT>
+                    <a:lnB cap="flat" cmpd="sng" algn="ctr" w="9525">
+                      <a:solidFill>
+                        <a:srgbClr val="999999"/>
+                      </a:solidFill>
+                      <a:prstDash val="solid"/>
+                    </a:lnB>
+                    <a:solidFill>
+                      <a:srgbClr val="F2F2F2"/>
+                    </a:solidFill>
+                  </a:tcPr>
+                </a:tc>
+              </a:tr>
+              <a:tr h="387000">
+                <a:tc>
+                  <a:txBody>
+                    <a:bodyPr wrap="square"/>
+                    <a:lstStyle/>
+                    <a:p>
+                      <a:pPr algn="ctr"/>
+                      <a:r>
+                        <a:rPr sz="1100" b="1">
+                          <a:solidFill>
+                            <a:srgbClr val="1A1A1A"/>
+                          </a:solidFill>
+                          <a:latin typeface="Arial"/>
+                          <a:ea typeface="Arial"/>
+                          <a:cs typeface="Arial"/>
+                        </a:rPr>
+                        <a:t>結果5</a:t>
+                      </a:r>
+                    </a:p>
+                  </a:txBody>
+                  <a:tcPr marL="91440" marR="91440" marT="36576" marB="36576">
+                    <a:lnL cap="flat" cmpd="sng" algn="ctr" w="0">
+                      <a:noFill/>
+                    </a:lnL>
+                    <a:lnR cap="flat" cmpd="sng" algn="ctr" w="0">
+                      <a:noFill/>
+                    </a:lnR>
+                    <a:lnT cap="flat" cmpd="sng" algn="ctr" w="0">
+                      <a:noFill/>
+                    </a:lnT>
+                    <a:lnB cap="flat" cmpd="sng" algn="ctr" w="9525">
+                      <a:solidFill>
+                        <a:srgbClr val="999999"/>
+                      </a:solidFill>
+                      <a:prstDash val="solid"/>
+                    </a:lnB>
+                    <a:solidFill>
+                      <a:srgbClr val="FFFFFF"/>
+                    </a:solidFill>
+                  </a:tcPr>
+                </a:tc>
+                <a:tc>
+                  <a:txBody>
+                    <a:bodyPr wrap="square"/>
+                    <a:lstStyle/>
+                    <a:p>
+                      <a:pPr algn="l"/>
+                      <a:r>
+                        <a:rPr sz="1050" b="0">
+                          <a:solidFill>
+                            <a:srgbClr val="1A1A1A"/>
+                          </a:solidFill>
+                          <a:latin typeface="Arial"/>
+                          <a:ea typeface="Arial"/>
+                          <a:cs typeface="Arial"/>
+                        </a:rPr>
+                        <a:t>同上（ベースラインMMSE調整後）</a:t>
+                      </a:r>
+                    </a:p>
+                  </a:txBody>
+                  <a:tcPr marL="91440" marR="91440" marT="36576" marB="36576">
+                    <a:lnL cap="flat" cmpd="sng" algn="ctr" w="0">
+                      <a:noFill/>
+                    </a:lnL>
+                    <a:lnR cap="flat" cmpd="sng" algn="ctr" w="0">
+                      <a:noFill/>
+                    </a:lnR>
+                    <a:lnT cap="flat" cmpd="sng" algn="ctr" w="0">
+                      <a:noFill/>
+                    </a:lnT>
+                    <a:lnB cap="flat" cmpd="sng" algn="ctr" w="9525">
+                      <a:solidFill>
+                        <a:srgbClr val="999999"/>
+                      </a:solidFill>
+                      <a:prstDash val="solid"/>
+                    </a:lnB>
+                    <a:solidFill>
+                      <a:srgbClr val="FFFFFF"/>
+                    </a:solidFill>
+                  </a:tcPr>
+                </a:tc>
+                <a:tc>
+                  <a:txBody>
+                    <a:bodyPr wrap="square"/>
+                    <a:lstStyle/>
+                    <a:p>
+                      <a:pPr algn="l"/>
+                      <a:r>
+                        <a:rPr sz="1050" b="0">
+                          <a:solidFill>
+                            <a:srgbClr val="1A1A1A"/>
+                          </a:solidFill>
+                          <a:latin typeface="Arial"/>
+                          <a:ea typeface="Arial"/>
+                          <a:cs typeface="Arial"/>
+                        </a:rPr>
+                        <a:t>ANCOVA相当（線形回帰）</a:t>
+                      </a:r>
+                    </a:p>
+                  </a:txBody>
+                  <a:tcPr marL="91440" marR="91440" marT="36576" marB="36576">
+                    <a:lnL cap="flat" cmpd="sng" algn="ctr" w="0">
+                      <a:noFill/>
+                    </a:lnL>
+                    <a:lnR cap="flat" cmpd="sng" algn="ctr" w="0">
+                      <a:noFill/>
+                    </a:lnR>
+                    <a:lnT cap="flat" cmpd="sng" algn="ctr" w="0">
+                      <a:noFill/>
+                    </a:lnT>
+                    <a:lnB cap="flat" cmpd="sng" algn="ctr" w="9525">
+                      <a:solidFill>
+                        <a:srgbClr val="999999"/>
+                      </a:solidFill>
+                      <a:prstDash val="solid"/>
+                    </a:lnB>
+                    <a:solidFill>
+                      <a:srgbClr val="FFFFFF"/>
+                    </a:solidFill>
+                  </a:tcPr>
+                </a:tc>
+                <a:tc>
+                  <a:txBody>
+                    <a:bodyPr wrap="square"/>
+                    <a:lstStyle/>
+                    <a:p>
+                      <a:pPr algn="ctr"/>
+                      <a:r>
+                        <a:rPr sz="1100" b="1">
+                          <a:solidFill>
+                            <a:srgbClr val="1A1A1A"/>
+                          </a:solidFill>
+                          <a:latin typeface="Arial"/>
+                          <a:ea typeface="Arial"/>
+                          <a:cs typeface="Arial"/>
+                        </a:rPr>
+                        <a:t>p = 0.879</a:t>
+                      </a:r>
+                    </a:p>
+                  </a:txBody>
+                  <a:tcPr marL="91440" marR="91440" marT="36576" marB="36576">
+                    <a:lnL cap="flat" cmpd="sng" algn="ctr" w="0">
+                      <a:noFill/>
+                    </a:lnL>
+                    <a:lnR cap="flat" cmpd="sng" algn="ctr" w="0">
+                      <a:noFill/>
+                    </a:lnR>
+                    <a:lnT cap="flat" cmpd="sng" algn="ctr" w="0">
+                      <a:noFill/>
+                    </a:lnT>
+                    <a:lnB cap="flat" cmpd="sng" algn="ctr" w="9525">
+                      <a:solidFill>
+                        <a:srgbClr val="999999"/>
+                      </a:solidFill>
+                      <a:prstDash val="solid"/>
+                    </a:lnB>
+                    <a:solidFill>
+                      <a:srgbClr val="FFFFFF"/>
+                    </a:solidFill>
+                  </a:tcPr>
+                </a:tc>
+                <a:tc>
+                  <a:txBody>
+                    <a:bodyPr wrap="square"/>
+                    <a:lstStyle/>
+                    <a:p>
+                      <a:pPr algn="ctr"/>
+                      <a:r>
+                        <a:rPr sz="1050" b="1">
+                          <a:solidFill>
+                            <a:srgbClr val="404040"/>
+                          </a:solidFill>
+                          <a:latin typeface="Arial"/>
+                          <a:ea typeface="Arial"/>
+                          <a:cs typeface="Arial"/>
+                        </a:rPr>
+                        <a:t>有意差なし</a:t>
+                      </a:r>
+                    </a:p>
+                  </a:txBody>
+                  <a:tcPr marL="91440" marR="91440" marT="36576" marB="36576">
+                    <a:lnL cap="flat" cmpd="sng" algn="ctr" w="0">
+                      <a:noFill/>
+                    </a:lnL>
+                    <a:lnR cap="flat" cmpd="sng" algn="ctr" w="0">
+                      <a:noFill/>
+                    </a:lnR>
+                    <a:lnT cap="flat" cmpd="sng" algn="ctr" w="0">
+                      <a:noFill/>
+                    </a:lnT>
+                    <a:lnB cap="flat" cmpd="sng" algn="ctr" w="9525">
+                      <a:solidFill>
+                        <a:srgbClr val="999999"/>
+                      </a:solidFill>
+                      <a:prstDash val="solid"/>
+                    </a:lnB>
+                    <a:solidFill>
+                      <a:srgbClr val="F2F2F2"/>
+                    </a:solidFill>
+                  </a:tcPr>
+                </a:tc>
+              </a:tr>
+              <a:tr h="387000">
+                <a:tc>
+                  <a:txBody>
+                    <a:bodyPr wrap="square"/>
+                    <a:lstStyle/>
+                    <a:p>
+                      <a:pPr algn="ctr"/>
+                      <a:r>
+                        <a:rPr sz="1100" b="1">
+                          <a:solidFill>
+                            <a:srgbClr val="1A1A1A"/>
+                          </a:solidFill>
+                          <a:latin typeface="Arial"/>
+                          <a:ea typeface="Arial"/>
+                          <a:cs typeface="Arial"/>
+                        </a:rPr>
+                        <a:t>参考2</a:t>
+                      </a:r>
+                    </a:p>
+                  </a:txBody>
+                  <a:tcPr marL="91440" marR="91440" marT="36576" marB="36576">
+                    <a:lnL cap="flat" cmpd="sng" algn="ctr" w="0">
+                      <a:noFill/>
+                    </a:lnL>
+                    <a:lnR cap="flat" cmpd="sng" algn="ctr" w="0">
+                      <a:noFill/>
+                    </a:lnR>
+                    <a:lnT cap="flat" cmpd="sng" algn="ctr" w="0">
+                      <a:noFill/>
+                    </a:lnT>
+                    <a:lnB cap="flat" cmpd="sng" algn="ctr" w="9525">
+                      <a:solidFill>
+                        <a:srgbClr val="999999"/>
+                      </a:solidFill>
+                      <a:prstDash val="solid"/>
+                    </a:lnB>
+                    <a:solidFill>
+                      <a:srgbClr val="FFFFFF"/>
+                    </a:solidFill>
+                  </a:tcPr>
+                </a:tc>
+                <a:tc>
+                  <a:txBody>
+                    <a:bodyPr wrap="square"/>
+                    <a:lstStyle/>
+                    <a:p>
+                      <a:pPr algn="l"/>
+                      <a:r>
+                        <a:rPr sz="1050" b="0">
+                          <a:solidFill>
+                            <a:srgbClr val="1A1A1A"/>
+                          </a:solidFill>
+                          <a:latin typeface="Arial"/>
+                          <a:ea typeface="Arial"/>
+                          <a:cs typeface="Arial"/>
+                        </a:rPr>
+                        <a:t>ベースラインMMSEと18か月ΔMMSEの相関（29例）</a:t>
+                      </a:r>
+                    </a:p>
+                  </a:txBody>
+                  <a:tcPr marL="91440" marR="91440" marT="36576" marB="36576">
+                    <a:lnL cap="flat" cmpd="sng" algn="ctr" w="0">
+                      <a:noFill/>
+                    </a:lnL>
+                    <a:lnR cap="flat" cmpd="sng" algn="ctr" w="0">
+                      <a:noFill/>
+                    </a:lnR>
+                    <a:lnT cap="flat" cmpd="sng" algn="ctr" w="0">
+                      <a:noFill/>
+                    </a:lnT>
+                    <a:lnB cap="flat" cmpd="sng" algn="ctr" w="9525">
+                      <a:solidFill>
+                        <a:srgbClr val="999999"/>
+                      </a:solidFill>
+                      <a:prstDash val="solid"/>
+                    </a:lnB>
+                    <a:solidFill>
+                      <a:srgbClr val="FFFFFF"/>
+                    </a:solidFill>
+                  </a:tcPr>
+                </a:tc>
+                <a:tc>
+                  <a:txBody>
+                    <a:bodyPr wrap="square"/>
+                    <a:lstStyle/>
+                    <a:p>
+                      <a:pPr algn="l"/>
+                      <a:r>
+                        <a:rPr sz="1050" b="0">
+                          <a:solidFill>
+                            <a:srgbClr val="1A1A1A"/>
+                          </a:solidFill>
+                          <a:latin typeface="Arial"/>
+                          <a:ea typeface="Arial"/>
+                          <a:cs typeface="Arial"/>
+                        </a:rPr>
+                        <a:t>Pearson相関</a:t>
+                      </a:r>
+                    </a:p>
+                  </a:txBody>
+                  <a:tcPr marL="91440" marR="91440" marT="36576" marB="36576">
+                    <a:lnL cap="flat" cmpd="sng" algn="ctr" w="0">
+                      <a:noFill/>
+                    </a:lnL>
+                    <a:lnR cap="flat" cmpd="sng" algn="ctr" w="0">
+                      <a:noFill/>
+                    </a:lnR>
+                    <a:lnT cap="flat" cmpd="sng" algn="ctr" w="0">
+                      <a:noFill/>
+                    </a:lnT>
+                    <a:lnB cap="flat" cmpd="sng" algn="ctr" w="9525">
+                      <a:solidFill>
+                        <a:srgbClr val="999999"/>
+                      </a:solidFill>
+                      <a:prstDash val="solid"/>
+                    </a:lnB>
+                    <a:solidFill>
+                      <a:srgbClr val="FFFFFF"/>
+                    </a:solidFill>
+                  </a:tcPr>
+                </a:tc>
+                <a:tc>
+                  <a:txBody>
+                    <a:bodyPr wrap="square"/>
+                    <a:lstStyle/>
+                    <a:p>
+                      <a:pPr algn="ctr"/>
+                      <a:r>
+                        <a:rPr sz="1100" b="1">
+                          <a:solidFill>
+                            <a:srgbClr val="1A1A1A"/>
+                          </a:solidFill>
+                          <a:latin typeface="Arial"/>
+                          <a:ea typeface="Arial"/>
+                          <a:cs typeface="Arial"/>
+                        </a:rPr>
+                        <a:t>r=−0.50, p=0.006</a:t>
+                      </a:r>
+                    </a:p>
+                  </a:txBody>
+                  <a:tcPr marL="91440" marR="91440" marT="36576" marB="36576">
+                    <a:lnL cap="flat" cmpd="sng" algn="ctr" w="0">
+                      <a:noFill/>
+                    </a:lnL>
+                    <a:lnR cap="flat" cmpd="sng" algn="ctr" w="0">
+                      <a:noFill/>
+                    </a:lnR>
+                    <a:lnT cap="flat" cmpd="sng" algn="ctr" w="0">
+                      <a:noFill/>
+                    </a:lnT>
+                    <a:lnB cap="flat" cmpd="sng" algn="ctr" w="9525">
+                      <a:solidFill>
+                        <a:srgbClr val="999999"/>
+                      </a:solidFill>
+                      <a:prstDash val="solid"/>
+                    </a:lnB>
+                    <a:solidFill>
+                      <a:srgbClr val="FFFFFF"/>
+                    </a:solidFill>
+                  </a:tcPr>
+                </a:tc>
+                <a:tc>
+                  <a:txBody>
+                    <a:bodyPr wrap="square"/>
+                    <a:lstStyle/>
+                    <a:p>
+                      <a:pPr algn="ctr"/>
+                      <a:r>
+                        <a:rPr sz="1050" b="1">
+                          <a:solidFill>
+                            <a:srgbClr val="7A3508"/>
+                          </a:solidFill>
+                          <a:latin typeface="Arial"/>
+                          <a:ea typeface="Arial"/>
+                          <a:cs typeface="Arial"/>
+                        </a:rPr>
+                        <a:t>有意（要注意：回帰含む）</a:t>
+                      </a:r>
+                    </a:p>
+                  </a:txBody>
+                  <a:tcPr marL="91440" marR="91440" marT="36576" marB="36576">
+                    <a:lnL cap="flat" cmpd="sng" algn="ctr" w="0">
+                      <a:noFill/>
+                    </a:lnL>
+                    <a:lnR cap="flat" cmpd="sng" algn="ctr" w="0">
+                      <a:noFill/>
+                    </a:lnR>
+                    <a:lnT cap="flat" cmpd="sng" algn="ctr" w="0">
+                      <a:noFill/>
+                    </a:lnT>
+                    <a:lnB cap="flat" cmpd="sng" algn="ctr" w="9525">
+                      <a:solidFill>
+                        <a:srgbClr val="999999"/>
+                      </a:solidFill>
+                      <a:prstDash val="solid"/>
+                    </a:lnB>
+                    <a:solidFill>
+                      <a:srgbClr val="FDE9D9"/>
+                    </a:solidFill>
+                  </a:tcPr>
+                </a:tc>
+              </a:tr>
+            </a:tbl>
+          </a:graphicData>
+        </a:graphic>
+      </p:graphicFrame>
+      <p:sp>
+        <p:nvSpPr>
+          <p:cNvPr id="6" name="TextBox 5"/>
+          <p:cNvSpPr txBox="1"/>
+          <p:nvPr/>
+        </p:nvSpPr>
+        <p:spPr>
+          <a:xfrm>
+            <a:off x="457200" y="6126480"/>
+            <a:ext cx="11247120" cy="685800"/>
+          </a:xfrm>
+          <a:prstGeom prst="rect">
+            <a:avLst/>
+          </a:prstGeom>
+          <a:noFill/>
+        </p:spPr>
+        <p:txBody>
+          <a:bodyPr wrap="square" lIns="0" rIns="0" tIns="0" bIns="0">
+            <a:spAutoFit/>
+          </a:bodyPr>
+          <a:lstStyle/>
+          <a:p>
+            <a:pPr>
+              <a:lnSpc>
+                <a:spcPct val="115000"/>
+              </a:lnSpc>
+            </a:pPr>
+            <a:r>
+              <a:rPr sz="1050" b="0">
+                <a:solidFill>
+                  <a:srgbClr val="1A1A1A"/>
+                </a:solidFill>
+                <a:latin typeface="Arial"/>
+                <a:ea typeface="Arial"/>
+                <a:cs typeface="Arial"/>
+              </a:rPr>
+              <a:t>有意水準はいずれも α=0.05（両側）。結果3の「有意差あり」は事後的に定義した指標で多重比較の補正をしておらず、探索的所見として扱う。</a:t>
+            </a:r>
+          </a:p>
+          <a:p>
+            <a:pPr>
+              <a:lnSpc>
+                <a:spcPct val="115000"/>
+              </a:lnSpc>
+            </a:pPr>
+            <a:r>
+              <a:rPr sz="1050" b="0">
+                <a:solidFill>
+                  <a:srgbClr val="1A1A1A"/>
+                </a:solidFill>
+                <a:latin typeface="Arial"/>
+                <a:ea typeface="Arial"/>
+                <a:cs typeface="Arial"/>
+              </a:rPr>
+              <a:t>参考2の相関はΔMMSEがベースラインを含んで計算される値であるため、平均への回帰（regression to the mean）を数学的に含み、因果的な解釈はできない。</a:t>
+            </a:r>
+          </a:p>
+          <a:p>
+            <a:pPr>
+              <a:lnSpc>
+                <a:spcPct val="115000"/>
+              </a:lnSpc>
+            </a:pPr>
+            <a:r>
+              <a:rPr sz="1050" b="0">
+                <a:solidFill>
+                  <a:srgbClr val="1A1A1A"/>
+                </a:solidFill>
+                <a:latin typeface="Arial"/>
+                <a:ea typeface="Arial"/>
+                <a:cs typeface="Arial"/>
+              </a:rPr>
+              <a:t>上記以外の解析（結果2〜5・参考2）はいずれも有意差なし。データの詳細は各スライドのキャプション・スピーカーノートを参照。</a:t>
             </a:r>
           </a:p>
         </p:txBody>

--- a/8月5日に見せるスライド_更新版.pptx
+++ b/8月5日に見せるスライド_更新版.pptx
@@ -4884,6 +4884,24 @@
                 <a:ea typeface="Arial"/>
                 <a:cs typeface="Arial"/>
               </a:rPr>
+              <a:t>バッジの色は判定を表す（以降のスライドも共通）：灰色＝有意差なし／黄色＝有意差あり・探索的で未補正／橙＝有意差あり・交絡に要注意。</a:t>
+            </a:r>
+          </a:p>
+          <a:p>
+            <a:pPr>
+              <a:lnSpc>
+                <a:spcPct val="105000"/>
+              </a:lnSpc>
+            </a:pPr>
+            <a:r>
+              <a:rPr sz="1100" b="0">
+                <a:solidFill>
+                  <a:srgbClr val="1A1A1A"/>
+                </a:solidFill>
+                <a:latin typeface="Arial"/>
+                <a:ea typeface="Arial"/>
+                <a:cs typeface="Arial"/>
+              </a:rPr>
               <a:t>各時点の値はベースライン（0か月）からのΔMMSEの群平均、エラーバーは95% CI。淡色の点は個別症例（横方向にジッターを付与）。</a:t>
             </a:r>
           </a:p>
@@ -9077,6 +9095,24 @@
             <a:spAutoFit/>
           </a:bodyPr>
           <a:lstStyle/>
+          <a:p>
+            <a:pPr>
+              <a:lnSpc>
+                <a:spcPct val="115000"/>
+              </a:lnSpc>
+            </a:pPr>
+            <a:r>
+              <a:rPr sz="1050" b="0">
+                <a:solidFill>
+                  <a:srgbClr val="1A1A1A"/>
+                </a:solidFill>
+                <a:latin typeface="Arial"/>
+                <a:ea typeface="Arial"/>
+                <a:cs typeface="Arial"/>
+              </a:rPr>
+              <a:t>判定列の色：灰色＝有意差なし／黄色＝有意差あり・探索的で未補正／橙＝有意差あり・交絡に要注意（各スライドのバッジと共通の配色）。</a:t>
+            </a:r>
+          </a:p>
           <a:p>
             <a:pPr>
               <a:lnSpc>

--- a/8月5日に見せるスライド_更新版.pptx
+++ b/8月5日に見せるスライド_更新版.pptx
@@ -3835,8 +3835,8 @@
       <c:valAx>
         <c:axId val="2140495176"/>
         <c:scaling>
-          <c:max val="30.5"/>
-          <c:min val="14.5"/>
+          <c:max val="30.0"/>
+          <c:min val="14.0"/>
         </c:scaling>
         <c:delete val="0"/>
         <c:axPos val="l"/>
@@ -5511,8 +5511,8 @@
       <c:valAx>
         <c:axId val="2140495176"/>
         <c:scaling>
-          <c:max val="30.5"/>
-          <c:min val="14.5"/>
+          <c:max val="30.0"/>
+          <c:min val="14.0"/>
         </c:scaling>
         <c:delete val="0"/>
         <c:axPos val="l"/>
@@ -6179,10 +6179,10 @@
                 <c:formatCode>General</c:formatCode>
                 <c:ptCount val="2"/>
                 <c:pt idx="0">
-                  <c:v>0.6</c:v>
-                </c:pt>
-                <c:pt idx="1">
-                  <c:v>2.4</c:v>
+                  <c:v>0.2</c:v>
+                </c:pt>
+                <c:pt idx="1">
+                  <c:v>2.8</c:v>
                 </c:pt>
               </c:numCache>
             </c:numRef>
@@ -6236,10 +6236,10 @@
                 <c:formatCode>General</c:formatCode>
                 <c:ptCount val="2"/>
                 <c:pt idx="0">
-                  <c:v>0.6</c:v>
-                </c:pt>
-                <c:pt idx="1">
-                  <c:v>2.4</c:v>
+                  <c:v>0.2</c:v>
+                </c:pt>
+                <c:pt idx="1">
+                  <c:v>2.8</c:v>
                 </c:pt>
               </c:numCache>
             </c:numRef>
@@ -6268,8 +6268,8 @@
         <c:axId val="-2128940872"/>
         <c:scaling>
           <c:orientation val="minMax"/>
-          <c:max val="2.5"/>
-          <c:min val="0.5"/>
+          <c:max val="3.0"/>
+          <c:min val="0.0"/>
         </c:scaling>
         <c:delete val="0"/>
         <c:axPos val="b"/>
@@ -6328,8 +6328,8 @@
         <c:axId val="-2129643912"/>
         <c:scaling>
           <c:orientation val="minMax"/>
-          <c:max val="6.5"/>
-          <c:min val="-10.5"/>
+          <c:max val="10.0"/>
+          <c:min val="-10.0"/>
         </c:scaling>
         <c:delete val="0"/>
         <c:axPos val="l"/>
@@ -6767,10 +6767,10 @@
                 <c:formatCode>General</c:formatCode>
                 <c:ptCount val="2"/>
                 <c:pt idx="0">
-                  <c:v>18.4</c:v>
-                </c:pt>
-                <c:pt idx="1">
-                  <c:v>28.6</c:v>
+                  <c:v>18</c:v>
+                </c:pt>
+                <c:pt idx="1">
+                  <c:v>30</c:v>
                 </c:pt>
               </c:numCache>
             </c:numRef>
@@ -6782,10 +6782,10 @@
                 <c:formatCode>General</c:formatCode>
                 <c:ptCount val="2"/>
                 <c:pt idx="0">
-                  <c:v>4.157</c:v>
-                </c:pt>
-                <c:pt idx="1">
-                  <c:v>-4.498</c:v>
+                  <c:v>4.496</c:v>
+                </c:pt>
+                <c:pt idx="1">
+                  <c:v>-5.686</c:v>
                 </c:pt>
               </c:numCache>
             </c:numRef>
@@ -6824,10 +6824,10 @@
                 <c:formatCode>General</c:formatCode>
                 <c:ptCount val="2"/>
                 <c:pt idx="0">
-                  <c:v>18.4</c:v>
-                </c:pt>
-                <c:pt idx="1">
-                  <c:v>28.6</c:v>
+                  <c:v>18</c:v>
+                </c:pt>
+                <c:pt idx="1">
+                  <c:v>30</c:v>
                 </c:pt>
               </c:numCache>
             </c:numRef>
@@ -6856,8 +6856,8 @@
         <c:axId val="-2128940872"/>
         <c:scaling>
           <c:orientation val="minMax"/>
-          <c:max val="28.5"/>
-          <c:min val="17.5"/>
+          <c:max val="30.0"/>
+          <c:min val="18.0"/>
         </c:scaling>
         <c:delete val="0"/>
         <c:axPos val="b"/>
@@ -6926,8 +6926,8 @@
         <c:axId val="-2129643912"/>
         <c:scaling>
           <c:orientation val="minMax"/>
-          <c:max val="6.5"/>
-          <c:min val="-10.5"/>
+          <c:max val="10.0"/>
+          <c:min val="-10.0"/>
         </c:scaling>
         <c:delete val="0"/>
         <c:axPos val="l"/>
@@ -8060,10 +8060,10 @@
                 <c:formatCode>General</c:formatCode>
                 <c:ptCount val="2"/>
                 <c:pt idx="0">
-                  <c:v>3.5</c:v>
-                </c:pt>
-                <c:pt idx="1">
-                  <c:v>20.5</c:v>
+                  <c:v>0</c:v>
+                </c:pt>
+                <c:pt idx="1">
+                  <c:v>24</c:v>
                 </c:pt>
               </c:numCache>
             </c:numRef>
@@ -8092,8 +8092,8 @@
         <c:axId val="-2128940872"/>
         <c:scaling>
           <c:orientation val="minMax"/>
-          <c:max val="20.5"/>
-          <c:min val="3.5"/>
+          <c:max val="24.0"/>
+          <c:min val="0.0"/>
         </c:scaling>
         <c:delete val="0"/>
         <c:axPos val="b"/>
@@ -8162,8 +8162,8 @@
         <c:axId val="-2129643912"/>
         <c:scaling>
           <c:orientation val="minMax"/>
-          <c:max val="8.5"/>
-          <c:min val="-10.5"/>
+          <c:max val="10.0"/>
+          <c:min val="-10.0"/>
         </c:scaling>
         <c:delete val="0"/>
         <c:axPos val="l"/>
@@ -10515,8 +10515,8 @@
       <c:valAx>
         <c:axId val="2140495176"/>
         <c:scaling>
-          <c:max val="30.5"/>
-          <c:min val="14.5"/>
+          <c:max val="30.0"/>
+          <c:min val="14.0"/>
         </c:scaling>
         <c:delete val="0"/>
         <c:axPos val="l"/>

--- a/8月5日に見せるスライド_更新版.pptx
+++ b/8月5日に見せるスライド_更新版.pptx
@@ -808,16 +808,16 @@
                 <c:formatCode>General</c:formatCode>
                 <c:ptCount val="4"/>
                 <c:pt idx="0">
-                  <c:v>0.95</c:v>
-                </c:pt>
-                <c:pt idx="1">
-                  <c:v>1.06</c:v>
-                </c:pt>
-                <c:pt idx="2">
-                  <c:v>1.18</c:v>
-                </c:pt>
-                <c:pt idx="3">
-                  <c:v>1.59</c:v>
+                  <c:v>0.97</c:v>
+                </c:pt>
+                <c:pt idx="1">
+                  <c:v>1.01</c:v>
+                </c:pt>
+                <c:pt idx="2">
+                  <c:v>1.13</c:v>
+                </c:pt>
+                <c:pt idx="3">
+                  <c:v>1.12</c:v>
                 </c:pt>
               </c:numLit>
             </c:plus>
@@ -826,16 +826,16 @@
                 <c:formatCode>General</c:formatCode>
                 <c:ptCount val="4"/>
                 <c:pt idx="0">
-                  <c:v>0.95</c:v>
-                </c:pt>
-                <c:pt idx="1">
-                  <c:v>1.06</c:v>
-                </c:pt>
-                <c:pt idx="2">
-                  <c:v>1.18</c:v>
-                </c:pt>
-                <c:pt idx="3">
-                  <c:v>1.59</c:v>
+                  <c:v>0.97</c:v>
+                </c:pt>
+                <c:pt idx="1">
+                  <c:v>1.01</c:v>
+                </c:pt>
+                <c:pt idx="2">
+                  <c:v>1.13</c:v>
+                </c:pt>
+                <c:pt idx="3">
+                  <c:v>1.12</c:v>
                 </c:pt>
               </c:numLit>
             </c:minus>
@@ -1412,8 +1412,8 @@
       <c:valAx>
         <c:axId val="2140495176"/>
         <c:scaling>
-          <c:max val="1.49"/>
-          <c:min val="0.25"/>
+          <c:max val="1.0"/>
+          <c:min val="0.0"/>
         </c:scaling>
         <c:delete val="0"/>
         <c:axPos val="l"/>
@@ -1453,6 +1453,7 @@
         </c:txPr>
         <c:crossAx val="2118791784"/>
         <c:crosses val="autoZero"/>
+        <c:majorUnit val="1.0"/>
       </c:valAx>
     </c:plotArea>
     <c:plotVisOnly val="1"/>
@@ -1807,8 +1808,8 @@
       <c:valAx>
         <c:axId val="2140495176"/>
         <c:scaling>
-          <c:max val="1.62"/>
-          <c:min val="0.38"/>
+          <c:max val="1.0"/>
+          <c:min val="0.0"/>
         </c:scaling>
         <c:delete val="0"/>
         <c:axPos val="l"/>
@@ -1848,6 +1849,7 @@
         </c:txPr>
         <c:crossAx val="2118791784"/>
         <c:crosses val="autoZero"/>
+        <c:majorUnit val="1.0"/>
       </c:valAx>
     </c:plotArea>
     <c:plotVisOnly val="1"/>
@@ -2202,8 +2204,8 @@
       <c:valAx>
         <c:axId val="2140495176"/>
         <c:scaling>
-          <c:max val="3.34"/>
-          <c:min val="1.99"/>
+          <c:max val="3.0"/>
+          <c:min val="0.0"/>
         </c:scaling>
         <c:delete val="0"/>
         <c:axPos val="l"/>
@@ -2243,6 +2245,7 @@
         </c:txPr>
         <c:crossAx val="2118791784"/>
         <c:crosses val="autoZero"/>
+        <c:majorUnit val="1.0"/>
       </c:valAx>
     </c:plotArea>
     <c:plotVisOnly val="1"/>
@@ -2597,8 +2600,8 @@
       <c:valAx>
         <c:axId val="2140495176"/>
         <c:scaling>
-          <c:max val="1.41"/>
-          <c:min val="0.17"/>
+          <c:max val="1.0"/>
+          <c:min val="0.0"/>
         </c:scaling>
         <c:delete val="0"/>
         <c:axPos val="l"/>
@@ -2638,6 +2641,7 @@
         </c:txPr>
         <c:crossAx val="2118791784"/>
         <c:crosses val="autoZero"/>
+        <c:majorUnit val="1.0"/>
       </c:valAx>
     </c:plotArea>
     <c:plotVisOnly val="1"/>
@@ -2992,8 +2996,8 @@
       <c:valAx>
         <c:axId val="2140495176"/>
         <c:scaling>
-          <c:max val="1.33"/>
-          <c:min val="0.09"/>
+          <c:max val="1.0"/>
+          <c:min val="0.0"/>
         </c:scaling>
         <c:delete val="0"/>
         <c:axPos val="l"/>
@@ -3033,6 +3037,7 @@
         </c:txPr>
         <c:crossAx val="2118791784"/>
         <c:crosses val="autoZero"/>
+        <c:majorUnit val="1.0"/>
       </c:valAx>
     </c:plotArea>
     <c:plotVisOnly val="1"/>
@@ -11067,8 +11072,8 @@
       <c:valAx>
         <c:axId val="2140495176"/>
         <c:scaling>
-          <c:max val="5.37"/>
-          <c:min val="1.99"/>
+          <c:max val="5.0"/>
+          <c:min val="0.0"/>
         </c:scaling>
         <c:delete val="0"/>
         <c:axPos val="l"/>
@@ -11108,6 +11113,7 @@
         </c:txPr>
         <c:crossAx val="2118791784"/>
         <c:crosses val="autoZero"/>
+        <c:majorUnit val="1.0"/>
       </c:valAx>
     </c:plotArea>
     <c:plotVisOnly val="1"/>
@@ -11462,8 +11468,8 @@
       <c:valAx>
         <c:axId val="2140495176"/>
         <c:scaling>
-          <c:max val="5.29"/>
-          <c:min val="3.54"/>
+          <c:max val="5.0"/>
+          <c:min val="0.0"/>
         </c:scaling>
         <c:delete val="0"/>
         <c:axPos val="l"/>
@@ -11503,6 +11509,7 @@
         </c:txPr>
         <c:crossAx val="2118791784"/>
         <c:crosses val="autoZero"/>
+        <c:majorUnit val="1.0"/>
       </c:valAx>
     </c:plotArea>
     <c:plotVisOnly val="1"/>
@@ -11857,8 +11864,8 @@
       <c:valAx>
         <c:axId val="2140495176"/>
         <c:scaling>
-          <c:max val="2.51"/>
-          <c:min val="1.27"/>
+          <c:max val="2.0"/>
+          <c:min val="0.0"/>
         </c:scaling>
         <c:delete val="0"/>
         <c:axPos val="l"/>
@@ -11898,6 +11905,7 @@
         </c:txPr>
         <c:crossAx val="2118791784"/>
         <c:crosses val="autoZero"/>
+        <c:majorUnit val="1.0"/>
       </c:valAx>
     </c:plotArea>
     <c:plotVisOnly val="1"/>
@@ -12252,8 +12260,8 @@
       <c:valAx>
         <c:axId val="2140495176"/>
         <c:scaling>
-          <c:max val="3.51"/>
-          <c:min val="2.27"/>
+          <c:max val="3.0"/>
+          <c:min val="0.0"/>
         </c:scaling>
         <c:delete val="0"/>
         <c:axPos val="l"/>
@@ -12293,6 +12301,7 @@
         </c:txPr>
         <c:crossAx val="2118791784"/>
         <c:crosses val="autoZero"/>
+        <c:majorUnit val="1.0"/>
       </c:valAx>
     </c:plotArea>
     <c:plotVisOnly val="1"/>
@@ -12647,8 +12656,8 @@
       <c:valAx>
         <c:axId val="2140495176"/>
         <c:scaling>
-          <c:max val="5.31"/>
-          <c:min val="0.85"/>
+          <c:max val="5.0"/>
+          <c:min val="0.0"/>
         </c:scaling>
         <c:delete val="0"/>
         <c:axPos val="l"/>
@@ -12688,6 +12697,7 @@
         </c:txPr>
         <c:crossAx val="2118791784"/>
         <c:crosses val="autoZero"/>
+        <c:majorUnit val="1.0"/>
       </c:valAx>
     </c:plotArea>
     <c:plotVisOnly val="1"/>
@@ -13042,8 +13052,8 @@
       <c:valAx>
         <c:axId val="2140495176"/>
         <c:scaling>
-          <c:max val="2.2"/>
-          <c:min val="-0.47"/>
+          <c:max val="3.0"/>
+          <c:min val="0.0"/>
         </c:scaling>
         <c:delete val="0"/>
         <c:axPos val="l"/>
@@ -13083,6 +13093,7 @@
         </c:txPr>
         <c:crossAx val="2118791784"/>
         <c:crosses val="autoZero"/>
+        <c:majorUnit val="1.0"/>
       </c:valAx>
     </c:plotArea>
     <c:plotVisOnly val="1"/>

--- a/8月5日に見せるスライド_更新版.pptx
+++ b/8月5日に見せるスライド_更新版.pptx
@@ -15077,7 +15077,7 @@
                           <a:ea typeface="Cambria" pitchFamily="34" charset="-122"/>
                           <a:cs typeface="Arial" panose="020B0604020202020204" pitchFamily="34" charset="0"/>
                         </a:rPr>
-                        <a:t>24.4 ± 2.2</a:t>
+                        <a:t>24.4 ± 2.1</a:t>
                       </a:r>
                       <a:endParaRPr lang="en-US" sz="1300" dirty="0">
                         <a:latin typeface="Arial" panose="020B0604020202020204" pitchFamily="34" charset="0"/>
@@ -15303,7 +15303,7 @@
                           <a:ea typeface="Cambria" pitchFamily="34" charset="-122"/>
                           <a:cs typeface="Arial" panose="020B0604020202020204" pitchFamily="34" charset="0"/>
                         </a:rPr>
-                        <a:t>20.7 ± 3.0</a:t>
+                        <a:t>20.6 ± 3.0</a:t>
                       </a:r>
                       <a:endParaRPr lang="en-US" sz="1300" dirty="0">
                         <a:latin typeface="Arial" panose="020B0604020202020204" pitchFamily="34" charset="0"/>
@@ -15416,7 +15416,7 @@
                           <a:ea typeface="Cambria" pitchFamily="34" charset="-122"/>
                           <a:cs typeface="Arial" panose="020B0604020202020204" pitchFamily="34" charset="0"/>
                         </a:rPr>
-                        <a:t>60 (90.9%)</a:t>
+                        <a:t>56 (84.8%)</a:t>
                       </a:r>
                       <a:endParaRPr lang="en-US" sz="1300" dirty="0">
                         <a:latin typeface="Arial" panose="020B0604020202020204" pitchFamily="34" charset="0"/>
@@ -15642,7 +15642,7 @@
                           <a:ea typeface="Cambria" pitchFamily="34" charset="-122"/>
                           <a:cs typeface="Arial" panose="020B0604020202020204" pitchFamily="34" charset="0"/>
                         </a:rPr>
-                        <a:t>2.0 ± 1.1</a:t>
+                        <a:t>2.1 ± 1.0</a:t>
                       </a:r>
                       <a:endParaRPr lang="en-US" sz="1300" dirty="0">
                         <a:latin typeface="Arial" panose="020B0604020202020204" pitchFamily="34" charset="0"/>
@@ -16159,6 +16159,22 @@
               <a:latin typeface="Arial" panose="020B0604020202020204" pitchFamily="34" charset="0"/>
               <a:cs typeface="Arial" panose="020B0604020202020204" pitchFamily="34" charset="0"/>
             </a:endParaRPr>
+          </a:p>
+          <a:p>
+            <a:pPr>
+              <a:lnSpc>
+                <a:spcPct val="105000"/>
+              </a:lnSpc>
+            </a:pPr>
+            <a:r>
+              <a:rPr sz="1050">
+                <a:solidFill>
+                  <a:srgbClr val="000000"/>
+                </a:solidFill>
+                <a:latin typeface="Arial"/>
+              </a:rPr>
+              <a:t>MoCA-J（n=58）・CDR-SB／Global CDR（n=63）は原資料でCDR評価が未確認の症例を除いて算出。Global CDR評価済み63例の内訳はCDR=0.5が56例(88.9%)、CDR=1.0が6例(9.5%)、CDR=0.0が1例(1.6%)。年齢・性別・HDS-R合計点は本データ（xlsx）に該当項目がないため今回の照合対象外。</a:t>
+            </a:r>
           </a:p>
         </p:txBody>
       </p:sp>
